--- a/aih-sl-tutorial.pptx
+++ b/aih-sl-tutorial.pptx
@@ -5,7 +5,7 @@
     <p:sldMasterId id="2147483867" r:id="rId1"/>
   </p:sldMasterIdLst>
   <p:notesMasterIdLst>
-    <p:notesMasterId r:id="rId15"/>
+    <p:notesMasterId r:id="rId26"/>
   </p:notesMasterIdLst>
   <p:sldIdLst>
     <p:sldId id="256" r:id="rId2"/>
@@ -13,14 +13,25 @@
     <p:sldId id="261" r:id="rId4"/>
     <p:sldId id="257" r:id="rId5"/>
     <p:sldId id="262" r:id="rId6"/>
-    <p:sldId id="263" r:id="rId7"/>
-    <p:sldId id="266" r:id="rId8"/>
-    <p:sldId id="264" r:id="rId9"/>
-    <p:sldId id="267" r:id="rId10"/>
-    <p:sldId id="270" r:id="rId11"/>
-    <p:sldId id="268" r:id="rId12"/>
-    <p:sldId id="258" r:id="rId13"/>
-    <p:sldId id="272" r:id="rId14"/>
+    <p:sldId id="273" r:id="rId7"/>
+    <p:sldId id="263" r:id="rId8"/>
+    <p:sldId id="266" r:id="rId9"/>
+    <p:sldId id="274" r:id="rId10"/>
+    <p:sldId id="275" r:id="rId11"/>
+    <p:sldId id="276" r:id="rId12"/>
+    <p:sldId id="277" r:id="rId13"/>
+    <p:sldId id="278" r:id="rId14"/>
+    <p:sldId id="279" r:id="rId15"/>
+    <p:sldId id="280" r:id="rId16"/>
+    <p:sldId id="281" r:id="rId17"/>
+    <p:sldId id="282" r:id="rId18"/>
+    <p:sldId id="283" r:id="rId19"/>
+    <p:sldId id="264" r:id="rId20"/>
+    <p:sldId id="267" r:id="rId21"/>
+    <p:sldId id="270" r:id="rId22"/>
+    <p:sldId id="268" r:id="rId23"/>
+    <p:sldId id="258" r:id="rId24"/>
+    <p:sldId id="272" r:id="rId25"/>
   </p:sldIdLst>
   <p:sldSz cx="12192000" cy="6858000"/>
   <p:notesSz cx="6858000" cy="9144000"/>
@@ -991,6 +1002,19 @@
             <a:t>Background &amp; Goal</a:t>
           </a:r>
         </a:p>
+        <a:p>
+          <a:pPr>
+            <a:lnSpc>
+              <a:spcPct val="100000"/>
+            </a:lnSpc>
+            <a:buFont typeface="Arial" panose="020B0604020202020204" pitchFamily="34" charset="0"/>
+            <a:buNone/>
+          </a:pPr>
+          <a:r>
+            <a:rPr lang="en-US" sz="1400" dirty="0"/>
+            <a:t>Environment Setup</a:t>
+          </a:r>
+        </a:p>
       </dgm:t>
     </dgm:pt>
     <dgm:pt modelId="{C938567F-B179-4912-95F0-15FD1DE46569}" type="parTrans" cxnId="{B3863DDC-0A78-4EBD-ABB2-BB7653B0AF46}">
@@ -1514,8 +1538,8 @@
       </dsp:nvSpPr>
       <dsp:spPr>
         <a:xfrm>
-          <a:off x="0" y="4100"/>
-          <a:ext cx="4815840" cy="873409"/>
+          <a:off x="0" y="6659"/>
+          <a:ext cx="4815840" cy="872556"/>
         </a:xfrm>
         <a:prstGeom prst="roundRect">
           <a:avLst>
@@ -1556,8 +1580,8 @@
       </dsp:nvSpPr>
       <dsp:spPr>
         <a:xfrm>
-          <a:off x="264206" y="200617"/>
-          <a:ext cx="480375" cy="480375"/>
+          <a:off x="263948" y="202984"/>
+          <a:ext cx="479905" cy="479905"/>
         </a:xfrm>
         <a:prstGeom prst="rect">
           <a:avLst/>
@@ -1612,8 +1636,8 @@
       </dsp:nvSpPr>
       <dsp:spPr>
         <a:xfrm>
-          <a:off x="1008787" y="4100"/>
-          <a:ext cx="2167128" cy="873409"/>
+          <a:off x="1007802" y="6659"/>
+          <a:ext cx="2167128" cy="872556"/>
         </a:xfrm>
         <a:prstGeom prst="rect">
           <a:avLst/>
@@ -1637,7 +1661,7 @@
         <a:fontRef idx="minor"/>
       </dsp:style>
       <dsp:txBody>
-        <a:bodyPr spcFirstLastPara="0" vert="horz" wrap="square" lIns="92436" tIns="92436" rIns="92436" bIns="92436" numCol="1" spcCol="1270" anchor="ctr" anchorCtr="0">
+        <a:bodyPr spcFirstLastPara="0" vert="horz" wrap="square" lIns="92346" tIns="92346" rIns="92346" bIns="92346" numCol="1" spcCol="1270" anchor="ctr" anchorCtr="0">
           <a:noAutofit/>
         </a:bodyPr>
         <a:lstStyle/>
@@ -1661,8 +1685,8 @@
         </a:p>
       </dsp:txBody>
       <dsp:txXfrm>
-        <a:off x="1008787" y="4100"/>
-        <a:ext cx="2167128" cy="873409"/>
+        <a:off x="1007802" y="6659"/>
+        <a:ext cx="2167128" cy="872556"/>
       </dsp:txXfrm>
     </dsp:sp>
     <dsp:sp modelId="{160A4B5D-66BF-4D69-8843-14DC7898F82F}">
@@ -1672,8 +1696,8 @@
       </dsp:nvSpPr>
       <dsp:spPr>
         <a:xfrm>
-          <a:off x="3175915" y="4100"/>
-          <a:ext cx="1639924" cy="873409"/>
+          <a:off x="3174930" y="6659"/>
+          <a:ext cx="1639924" cy="872556"/>
         </a:xfrm>
         <a:prstGeom prst="rect">
           <a:avLst/>
@@ -1697,7 +1721,7 @@
         <a:fontRef idx="minor"/>
       </dsp:style>
       <dsp:txBody>
-        <a:bodyPr spcFirstLastPara="0" vert="horz" wrap="square" lIns="92436" tIns="92436" rIns="92436" bIns="92436" numCol="1" spcCol="1270" anchor="ctr" anchorCtr="0">
+        <a:bodyPr spcFirstLastPara="0" vert="horz" wrap="square" lIns="92346" tIns="92346" rIns="92346" bIns="92346" numCol="1" spcCol="1270" anchor="ctr" anchorCtr="0">
           <a:noAutofit/>
         </a:bodyPr>
         <a:lstStyle/>
@@ -1739,10 +1763,29 @@
             <a:t>Background &amp; Goal</a:t>
           </a:r>
         </a:p>
+        <a:p>
+          <a:pPr marL="0" lvl="0" indent="0" algn="l" defTabSz="622300">
+            <a:lnSpc>
+              <a:spcPct val="100000"/>
+            </a:lnSpc>
+            <a:spcBef>
+              <a:spcPct val="0"/>
+            </a:spcBef>
+            <a:spcAft>
+              <a:spcPct val="35000"/>
+            </a:spcAft>
+            <a:buFont typeface="Arial" panose="020B0604020202020204" pitchFamily="34" charset="0"/>
+            <a:buNone/>
+          </a:pPr>
+          <a:r>
+            <a:rPr lang="en-US" sz="1400" kern="1200" dirty="0"/>
+            <a:t>Environment Setup</a:t>
+          </a:r>
+        </a:p>
       </dsp:txBody>
       <dsp:txXfrm>
-        <a:off x="3175915" y="4100"/>
-        <a:ext cx="1639924" cy="873409"/>
+        <a:off x="3174930" y="6659"/>
+        <a:ext cx="1639924" cy="872556"/>
       </dsp:txXfrm>
     </dsp:sp>
     <dsp:sp modelId="{480D9EE7-792E-40EA-90B9-05ED819BBCB7}">
@@ -1752,8 +1795,8 @@
       </dsp:nvSpPr>
       <dsp:spPr>
         <a:xfrm>
-          <a:off x="0" y="1095861"/>
-          <a:ext cx="4815840" cy="873409"/>
+          <a:off x="0" y="1097354"/>
+          <a:ext cx="4815840" cy="872556"/>
         </a:xfrm>
         <a:prstGeom prst="roundRect">
           <a:avLst>
@@ -1794,8 +1837,8 @@
       </dsp:nvSpPr>
       <dsp:spPr>
         <a:xfrm>
-          <a:off x="264206" y="1292379"/>
-          <a:ext cx="480375" cy="480375"/>
+          <a:off x="263948" y="1293679"/>
+          <a:ext cx="479905" cy="479905"/>
         </a:xfrm>
         <a:prstGeom prst="rect">
           <a:avLst/>
@@ -1850,8 +1893,8 @@
       </dsp:nvSpPr>
       <dsp:spPr>
         <a:xfrm>
-          <a:off x="1008787" y="1095861"/>
-          <a:ext cx="3807052" cy="873409"/>
+          <a:off x="1007802" y="1097354"/>
+          <a:ext cx="3807052" cy="872556"/>
         </a:xfrm>
         <a:prstGeom prst="rect">
           <a:avLst/>
@@ -1875,7 +1918,7 @@
         <a:fontRef idx="minor"/>
       </dsp:style>
       <dsp:txBody>
-        <a:bodyPr spcFirstLastPara="0" vert="horz" wrap="square" lIns="92436" tIns="92436" rIns="92436" bIns="92436" numCol="1" spcCol="1270" anchor="ctr" anchorCtr="0">
+        <a:bodyPr spcFirstLastPara="0" vert="horz" wrap="square" lIns="92346" tIns="92346" rIns="92346" bIns="92346" numCol="1" spcCol="1270" anchor="ctr" anchorCtr="0">
           <a:noAutofit/>
         </a:bodyPr>
         <a:lstStyle/>
@@ -1900,8 +1943,8 @@
         </a:p>
       </dsp:txBody>
       <dsp:txXfrm>
-        <a:off x="1008787" y="1095861"/>
-        <a:ext cx="3807052" cy="873409"/>
+        <a:off x="1007802" y="1097354"/>
+        <a:ext cx="3807052" cy="872556"/>
       </dsp:txXfrm>
     </dsp:sp>
     <dsp:sp modelId="{FFE6E2E1-9C22-42F1-984B-BBF285EC1313}">
@@ -1911,8 +1954,8 @@
       </dsp:nvSpPr>
       <dsp:spPr>
         <a:xfrm>
-          <a:off x="0" y="2187623"/>
-          <a:ext cx="4815840" cy="873409"/>
+          <a:off x="0" y="2188049"/>
+          <a:ext cx="4815840" cy="872556"/>
         </a:xfrm>
         <a:prstGeom prst="roundRect">
           <a:avLst>
@@ -1953,8 +1996,8 @@
       </dsp:nvSpPr>
       <dsp:spPr>
         <a:xfrm>
-          <a:off x="264206" y="2384140"/>
-          <a:ext cx="480375" cy="480375"/>
+          <a:off x="263948" y="2384375"/>
+          <a:ext cx="479905" cy="479905"/>
         </a:xfrm>
         <a:prstGeom prst="rect">
           <a:avLst/>
@@ -2009,8 +2052,8 @@
       </dsp:nvSpPr>
       <dsp:spPr>
         <a:xfrm>
-          <a:off x="1008787" y="2187623"/>
-          <a:ext cx="3807052" cy="873409"/>
+          <a:off x="1007802" y="2188049"/>
+          <a:ext cx="3807052" cy="872556"/>
         </a:xfrm>
         <a:prstGeom prst="rect">
           <a:avLst/>
@@ -2034,7 +2077,7 @@
         <a:fontRef idx="minor"/>
       </dsp:style>
       <dsp:txBody>
-        <a:bodyPr spcFirstLastPara="0" vert="horz" wrap="square" lIns="92436" tIns="92436" rIns="92436" bIns="92436" numCol="1" spcCol="1270" anchor="ctr" anchorCtr="0">
+        <a:bodyPr spcFirstLastPara="0" vert="horz" wrap="square" lIns="92346" tIns="92346" rIns="92346" bIns="92346" numCol="1" spcCol="1270" anchor="ctr" anchorCtr="0">
           <a:noAutofit/>
         </a:bodyPr>
         <a:lstStyle/>
@@ -2058,8 +2101,8 @@
         </a:p>
       </dsp:txBody>
       <dsp:txXfrm>
-        <a:off x="1008787" y="2187623"/>
-        <a:ext cx="3807052" cy="873409"/>
+        <a:off x="1007802" y="2188049"/>
+        <a:ext cx="3807052" cy="872556"/>
       </dsp:txXfrm>
     </dsp:sp>
     <dsp:sp modelId="{1AAE8DD3-C2AF-4B45-8CF3-1972726CD091}">
@@ -2069,8 +2112,8 @@
       </dsp:nvSpPr>
       <dsp:spPr>
         <a:xfrm>
-          <a:off x="0" y="3279384"/>
-          <a:ext cx="4815840" cy="873409"/>
+          <a:off x="0" y="3278745"/>
+          <a:ext cx="4815840" cy="872556"/>
         </a:xfrm>
         <a:prstGeom prst="roundRect">
           <a:avLst>
@@ -2111,8 +2154,8 @@
       </dsp:nvSpPr>
       <dsp:spPr>
         <a:xfrm>
-          <a:off x="264206" y="3475901"/>
-          <a:ext cx="480375" cy="480375"/>
+          <a:off x="263948" y="3475070"/>
+          <a:ext cx="479905" cy="479905"/>
         </a:xfrm>
         <a:prstGeom prst="rect">
           <a:avLst/>
@@ -2167,8 +2210,8 @@
       </dsp:nvSpPr>
       <dsp:spPr>
         <a:xfrm>
-          <a:off x="1008787" y="3279384"/>
-          <a:ext cx="3807052" cy="873409"/>
+          <a:off x="1007802" y="3278745"/>
+          <a:ext cx="3807052" cy="872556"/>
         </a:xfrm>
         <a:prstGeom prst="rect">
           <a:avLst/>
@@ -2192,7 +2235,7 @@
         <a:fontRef idx="minor"/>
       </dsp:style>
       <dsp:txBody>
-        <a:bodyPr spcFirstLastPara="0" vert="horz" wrap="square" lIns="92436" tIns="92436" rIns="92436" bIns="92436" numCol="1" spcCol="1270" anchor="ctr" anchorCtr="0">
+        <a:bodyPr spcFirstLastPara="0" vert="horz" wrap="square" lIns="92346" tIns="92346" rIns="92346" bIns="92346" numCol="1" spcCol="1270" anchor="ctr" anchorCtr="0">
           <a:noAutofit/>
         </a:bodyPr>
         <a:lstStyle/>
@@ -2216,8 +2259,8 @@
         </a:p>
       </dsp:txBody>
       <dsp:txXfrm>
-        <a:off x="1008787" y="3279384"/>
-        <a:ext cx="3807052" cy="873409"/>
+        <a:off x="1007802" y="3278745"/>
+        <a:ext cx="3807052" cy="872556"/>
       </dsp:txXfrm>
     </dsp:sp>
     <dsp:sp modelId="{30AEF1B5-48E1-40B9-8B5D-5429DA4BF730}">
@@ -2227,8 +2270,8 @@
       </dsp:nvSpPr>
       <dsp:spPr>
         <a:xfrm>
-          <a:off x="0" y="4371146"/>
-          <a:ext cx="4815840" cy="873409"/>
+          <a:off x="0" y="4369440"/>
+          <a:ext cx="4815840" cy="872556"/>
         </a:xfrm>
         <a:prstGeom prst="roundRect">
           <a:avLst>
@@ -2269,8 +2312,8 @@
       </dsp:nvSpPr>
       <dsp:spPr>
         <a:xfrm>
-          <a:off x="264206" y="4567663"/>
-          <a:ext cx="480375" cy="480375"/>
+          <a:off x="263948" y="4565765"/>
+          <a:ext cx="479905" cy="479905"/>
         </a:xfrm>
         <a:prstGeom prst="rect">
           <a:avLst/>
@@ -2325,8 +2368,8 @@
       </dsp:nvSpPr>
       <dsp:spPr>
         <a:xfrm>
-          <a:off x="1008787" y="4371146"/>
-          <a:ext cx="3807052" cy="873409"/>
+          <a:off x="1007802" y="4369440"/>
+          <a:ext cx="3807052" cy="872556"/>
         </a:xfrm>
         <a:prstGeom prst="rect">
           <a:avLst/>
@@ -2350,7 +2393,7 @@
         <a:fontRef idx="minor"/>
       </dsp:style>
       <dsp:txBody>
-        <a:bodyPr spcFirstLastPara="0" vert="horz" wrap="square" lIns="92436" tIns="92436" rIns="92436" bIns="92436" numCol="1" spcCol="1270" anchor="ctr" anchorCtr="0">
+        <a:bodyPr spcFirstLastPara="0" vert="horz" wrap="square" lIns="92346" tIns="92346" rIns="92346" bIns="92346" numCol="1" spcCol="1270" anchor="ctr" anchorCtr="0">
           <a:noAutofit/>
         </a:bodyPr>
         <a:lstStyle/>
@@ -2374,8 +2417,8 @@
         </a:p>
       </dsp:txBody>
       <dsp:txXfrm>
-        <a:off x="1008787" y="4371146"/>
-        <a:ext cx="3807052" cy="873409"/>
+        <a:off x="1007802" y="4369440"/>
+        <a:ext cx="3807052" cy="872556"/>
       </dsp:txXfrm>
     </dsp:sp>
   </dsp:spTree>
@@ -4326,6 +4369,114 @@
     <p:extLst>
       <p:ext uri="{BB962C8B-B14F-4D97-AF65-F5344CB8AC3E}">
         <p14:creationId xmlns:p14="http://schemas.microsoft.com/office/powerpoint/2010/main" val="1845357157"/>
+      </p:ext>
+    </p:extLst>
+  </p:cSld>
+  <p:clrMapOvr>
+    <a:masterClrMapping/>
+  </p:clrMapOvr>
+</p:notes>
+</file>
+
+<file path=ppt/notesSlides/notesSlide4.xml><?xml version="1.0" encoding="utf-8"?>
+<p:notes xmlns:a="http://schemas.openxmlformats.org/drawingml/2006/main" xmlns:r="http://schemas.openxmlformats.org/officeDocument/2006/relationships" xmlns:p="http://schemas.openxmlformats.org/presentationml/2006/main">
+  <p:cSld>
+    <p:spTree>
+      <p:nvGrpSpPr>
+        <p:cNvPr id="1" name="">
+          <a:extLst>
+            <a:ext uri="{FF2B5EF4-FFF2-40B4-BE49-F238E27FC236}">
+              <a16:creationId xmlns:a16="http://schemas.microsoft.com/office/drawing/2014/main" id="{E07E74DB-62AD-4CE3-6599-926D6CD8F16A}"/>
+            </a:ext>
+          </a:extLst>
+        </p:cNvPr>
+        <p:cNvGrpSpPr/>
+        <p:nvPr/>
+      </p:nvGrpSpPr>
+      <p:grpSpPr>
+        <a:xfrm>
+          <a:off x="0" y="0"/>
+          <a:ext cx="0" cy="0"/>
+          <a:chOff x="0" y="0"/>
+          <a:chExt cx="0" cy="0"/>
+        </a:xfrm>
+      </p:grpSpPr>
+      <p:sp>
+        <p:nvSpPr>
+          <p:cNvPr id="2" name="Slide Image Placeholder 1">
+            <a:extLst>
+              <a:ext uri="{FF2B5EF4-FFF2-40B4-BE49-F238E27FC236}">
+                <a16:creationId xmlns:a16="http://schemas.microsoft.com/office/drawing/2014/main" id="{70561E9E-DE2F-9CFB-6753-349940D0B0C3}"/>
+              </a:ext>
+            </a:extLst>
+          </p:cNvPr>
+          <p:cNvSpPr>
+            <a:spLocks noGrp="1" noRot="1" noChangeAspect="1"/>
+          </p:cNvSpPr>
+          <p:nvPr>
+            <p:ph type="sldImg"/>
+          </p:nvPr>
+        </p:nvSpPr>
+        <p:spPr/>
+      </p:sp>
+      <p:sp>
+        <p:nvSpPr>
+          <p:cNvPr id="3" name="Notes Placeholder 2">
+            <a:extLst>
+              <a:ext uri="{FF2B5EF4-FFF2-40B4-BE49-F238E27FC236}">
+                <a16:creationId xmlns:a16="http://schemas.microsoft.com/office/drawing/2014/main" id="{B378576E-A6E5-3602-577F-277254BEEE4E}"/>
+              </a:ext>
+            </a:extLst>
+          </p:cNvPr>
+          <p:cNvSpPr>
+            <a:spLocks noGrp="1"/>
+          </p:cNvSpPr>
+          <p:nvPr>
+            <p:ph type="body" idx="1"/>
+          </p:nvPr>
+        </p:nvSpPr>
+        <p:spPr/>
+        <p:txBody>
+          <a:bodyPr/>
+          <a:lstStyle/>
+          <a:p>
+            <a:endParaRPr lang="en-US" dirty="0"/>
+          </a:p>
+        </p:txBody>
+      </p:sp>
+      <p:sp>
+        <p:nvSpPr>
+          <p:cNvPr id="4" name="Slide Number Placeholder 3">
+            <a:extLst>
+              <a:ext uri="{FF2B5EF4-FFF2-40B4-BE49-F238E27FC236}">
+                <a16:creationId xmlns:a16="http://schemas.microsoft.com/office/drawing/2014/main" id="{801DA098-3FE6-AD1E-E0E8-3B37A830E456}"/>
+              </a:ext>
+            </a:extLst>
+          </p:cNvPr>
+          <p:cNvSpPr>
+            <a:spLocks noGrp="1"/>
+          </p:cNvSpPr>
+          <p:nvPr>
+            <p:ph type="sldNum" sz="quarter" idx="5"/>
+          </p:nvPr>
+        </p:nvSpPr>
+        <p:spPr/>
+        <p:txBody>
+          <a:bodyPr/>
+          <a:lstStyle/>
+          <a:p>
+            <a:fld id="{D81CAC63-576D-2546-B78A-340B6F601E2C}" type="slidenum">
+              <a:rPr lang="en-US" smtClean="0"/>
+              <a:t>6</a:t>
+            </a:fld>
+            <a:endParaRPr lang="en-US"/>
+          </a:p>
+        </p:txBody>
+      </p:sp>
+    </p:spTree>
+    <p:extLst>
+      <p:ext uri="{BB962C8B-B14F-4D97-AF65-F5344CB8AC3E}">
+        <p14:creationId xmlns:p14="http://schemas.microsoft.com/office/powerpoint/2010/main" val="990614272"/>
       </p:ext>
     </p:extLst>
   </p:cSld>
@@ -7559,21 +7710,21 @@
           <a:lstStyle/>
           <a:p>
             <a:r>
-              <a:rPr lang="en-US"/>
+              <a:rPr lang="en-US" dirty="0"/>
               <a:t>Self-Learning Tutorial:</a:t>
             </a:r>
             <a:br>
-              <a:rPr lang="en-US"/>
+              <a:rPr lang="en-US" dirty="0"/>
             </a:br>
             <a:br>
-              <a:rPr lang="en-US"/>
+              <a:rPr lang="en-US" dirty="0"/>
             </a:br>
             <a:r>
-              <a:rPr lang="en-US"/>
+              <a:rPr lang="en-US" dirty="0"/>
               <a:t>EDA &amp; Predictive Modeling of Chronic Illnesses</a:t>
             </a:r>
             <a:br>
-              <a:rPr lang="en-US"/>
+              <a:rPr lang="en-US" dirty="0"/>
             </a:br>
             <a:endParaRPr lang="en-US" dirty="0"/>
           </a:p>
@@ -7638,6 +7789,1873 @@
 </file>
 
 <file path=ppt/slides/slide10.xml><?xml version="1.0" encoding="utf-8"?>
+<p:sld xmlns:a="http://schemas.openxmlformats.org/drawingml/2006/main" xmlns:r="http://schemas.openxmlformats.org/officeDocument/2006/relationships" xmlns:p="http://schemas.openxmlformats.org/presentationml/2006/main">
+  <p:cSld>
+    <p:spTree>
+      <p:nvGrpSpPr>
+        <p:cNvPr id="1" name=""/>
+        <p:cNvGrpSpPr/>
+        <p:nvPr/>
+      </p:nvGrpSpPr>
+      <p:grpSpPr>
+        <a:xfrm>
+          <a:off x="0" y="0"/>
+          <a:ext cx="0" cy="0"/>
+          <a:chOff x="0" y="0"/>
+          <a:chExt cx="0" cy="0"/>
+        </a:xfrm>
+      </p:grpSpPr>
+      <p:sp>
+        <p:nvSpPr>
+          <p:cNvPr id="2" name="Title 1">
+            <a:extLst>
+              <a:ext uri="{FF2B5EF4-FFF2-40B4-BE49-F238E27FC236}">
+                <a16:creationId xmlns:a16="http://schemas.microsoft.com/office/drawing/2014/main" id="{B4C649D7-1DD6-7941-CD81-E34092C30E98}"/>
+              </a:ext>
+            </a:extLst>
+          </p:cNvPr>
+          <p:cNvSpPr>
+            <a:spLocks noGrp="1"/>
+          </p:cNvSpPr>
+          <p:nvPr>
+            <p:ph type="title"/>
+          </p:nvPr>
+        </p:nvSpPr>
+        <p:spPr/>
+        <p:txBody>
+          <a:bodyPr/>
+          <a:lstStyle/>
+          <a:p>
+            <a:r>
+              <a:rPr lang="en-US" dirty="0"/>
+              <a:t>User Counts by Sex</a:t>
+            </a:r>
+          </a:p>
+        </p:txBody>
+      </p:sp>
+      <p:sp>
+        <p:nvSpPr>
+          <p:cNvPr id="3" name="Content Placeholder 2">
+            <a:extLst>
+              <a:ext uri="{FF2B5EF4-FFF2-40B4-BE49-F238E27FC236}">
+                <a16:creationId xmlns:a16="http://schemas.microsoft.com/office/drawing/2014/main" id="{21CCC59A-3D87-0582-FF2F-B49E2BFF887F}"/>
+              </a:ext>
+            </a:extLst>
+          </p:cNvPr>
+          <p:cNvSpPr>
+            <a:spLocks noGrp="1"/>
+          </p:cNvSpPr>
+          <p:nvPr>
+            <p:ph idx="1"/>
+          </p:nvPr>
+        </p:nvSpPr>
+        <p:spPr>
+          <a:xfrm>
+            <a:off x="2231136" y="2638044"/>
+            <a:ext cx="3864864" cy="3101983"/>
+          </a:xfrm>
+        </p:spPr>
+        <p:txBody>
+          <a:bodyPr/>
+          <a:lstStyle/>
+          <a:p>
+            <a:r>
+              <a:rPr lang="en-US" sz="2400" dirty="0"/>
+              <a:t>Plot user counts by sex with </a:t>
+            </a:r>
+            <a:r>
+              <a:rPr lang="en-US" sz="2400" dirty="0" err="1"/>
+              <a:t>Plotly</a:t>
+            </a:r>
+            <a:r>
+              <a:rPr lang="en-US" sz="2400" dirty="0"/>
+              <a:t> express histogram</a:t>
+            </a:r>
+          </a:p>
+          <a:p>
+            <a:r>
+              <a:rPr lang="en-US" sz="2400" dirty="0"/>
+              <a:t>The vast majority of users (82%) are female</a:t>
+            </a:r>
+          </a:p>
+          <a:p>
+            <a:endParaRPr lang="en-US" dirty="0"/>
+          </a:p>
+        </p:txBody>
+      </p:sp>
+      <p:pic>
+        <p:nvPicPr>
+          <p:cNvPr id="9" name="Picture 8" descr="A screenshot of a computer screen&#10;&#10;AI-generated content may be incorrect.">
+            <a:extLst>
+              <a:ext uri="{FF2B5EF4-FFF2-40B4-BE49-F238E27FC236}">
+                <a16:creationId xmlns:a16="http://schemas.microsoft.com/office/drawing/2014/main" id="{4C0ACF30-1969-963D-69CE-9443A0CDA9CE}"/>
+              </a:ext>
+            </a:extLst>
+          </p:cNvPr>
+          <p:cNvPicPr>
+            <a:picLocks noChangeAspect="1"/>
+          </p:cNvPicPr>
+          <p:nvPr/>
+        </p:nvPicPr>
+        <p:blipFill>
+          <a:blip r:embed="rId2"/>
+          <a:srcRect r="1369" b="14773"/>
+          <a:stretch/>
+        </p:blipFill>
+        <p:spPr>
+          <a:xfrm>
+            <a:off x="6096000" y="2281805"/>
+            <a:ext cx="5365898" cy="4576195"/>
+          </a:xfrm>
+          <a:prstGeom prst="rect">
+            <a:avLst/>
+          </a:prstGeom>
+        </p:spPr>
+      </p:pic>
+    </p:spTree>
+    <p:extLst>
+      <p:ext uri="{BB962C8B-B14F-4D97-AF65-F5344CB8AC3E}">
+        <p14:creationId xmlns:p14="http://schemas.microsoft.com/office/powerpoint/2010/main" val="1726771323"/>
+      </p:ext>
+    </p:extLst>
+  </p:cSld>
+  <p:clrMapOvr>
+    <a:masterClrMapping/>
+  </p:clrMapOvr>
+</p:sld>
+</file>
+
+<file path=ppt/slides/slide11.xml><?xml version="1.0" encoding="utf-8"?>
+<p:sld xmlns:a="http://schemas.openxmlformats.org/drawingml/2006/main" xmlns:r="http://schemas.openxmlformats.org/officeDocument/2006/relationships" xmlns:p="http://schemas.openxmlformats.org/presentationml/2006/main">
+  <p:cSld>
+    <p:spTree>
+      <p:nvGrpSpPr>
+        <p:cNvPr id="1" name=""/>
+        <p:cNvGrpSpPr/>
+        <p:nvPr/>
+      </p:nvGrpSpPr>
+      <p:grpSpPr>
+        <a:xfrm>
+          <a:off x="0" y="0"/>
+          <a:ext cx="0" cy="0"/>
+          <a:chOff x="0" y="0"/>
+          <a:chExt cx="0" cy="0"/>
+        </a:xfrm>
+      </p:grpSpPr>
+      <p:sp>
+        <p:nvSpPr>
+          <p:cNvPr id="2" name="Title 1">
+            <a:extLst>
+              <a:ext uri="{FF2B5EF4-FFF2-40B4-BE49-F238E27FC236}">
+                <a16:creationId xmlns:a16="http://schemas.microsoft.com/office/drawing/2014/main" id="{EE58AD0C-8397-CAAE-4B9D-ACCCC414EAA0}"/>
+              </a:ext>
+            </a:extLst>
+          </p:cNvPr>
+          <p:cNvSpPr>
+            <a:spLocks noGrp="1"/>
+          </p:cNvSpPr>
+          <p:nvPr>
+            <p:ph type="title"/>
+          </p:nvPr>
+        </p:nvSpPr>
+        <p:spPr/>
+        <p:txBody>
+          <a:bodyPr/>
+          <a:lstStyle/>
+          <a:p>
+            <a:r>
+              <a:rPr lang="en-US" sz="2800" dirty="0"/>
+              <a:t>top 10 countries by user counts</a:t>
+            </a:r>
+            <a:endParaRPr lang="en-US" dirty="0"/>
+          </a:p>
+        </p:txBody>
+      </p:sp>
+      <p:sp>
+        <p:nvSpPr>
+          <p:cNvPr id="3" name="Content Placeholder 2">
+            <a:extLst>
+              <a:ext uri="{FF2B5EF4-FFF2-40B4-BE49-F238E27FC236}">
+                <a16:creationId xmlns:a16="http://schemas.microsoft.com/office/drawing/2014/main" id="{38E6F636-4526-2D14-8035-315D14B8D9AE}"/>
+              </a:ext>
+            </a:extLst>
+          </p:cNvPr>
+          <p:cNvSpPr>
+            <a:spLocks noGrp="1"/>
+          </p:cNvSpPr>
+          <p:nvPr>
+            <p:ph idx="1"/>
+          </p:nvPr>
+        </p:nvSpPr>
+        <p:spPr>
+          <a:xfrm>
+            <a:off x="2231136" y="2638044"/>
+            <a:ext cx="2679437" cy="3101983"/>
+          </a:xfrm>
+        </p:spPr>
+        <p:txBody>
+          <a:bodyPr>
+            <a:normAutofit fontScale="77500" lnSpcReduction="20000"/>
+          </a:bodyPr>
+          <a:lstStyle/>
+          <a:p>
+            <a:r>
+              <a:rPr lang="en-US" sz="2600" dirty="0"/>
+              <a:t>Get top 10 countries with sorted (descending) </a:t>
+            </a:r>
+            <a:r>
+              <a:rPr lang="en-US" sz="2600" dirty="0" err="1"/>
+              <a:t>groupby</a:t>
+            </a:r>
+            <a:r>
+              <a:rPr lang="en-US" sz="2600" dirty="0"/>
+              <a:t>() counts</a:t>
+            </a:r>
+          </a:p>
+          <a:p>
+            <a:r>
+              <a:rPr lang="en-US" sz="2600" dirty="0"/>
+              <a:t>Plot with </a:t>
+            </a:r>
+            <a:r>
+              <a:rPr lang="en-US" sz="2600" dirty="0" err="1"/>
+              <a:t>Plotly</a:t>
+            </a:r>
+            <a:r>
+              <a:rPr lang="en-US" sz="2600" dirty="0"/>
+              <a:t> express pie chart</a:t>
+            </a:r>
+          </a:p>
+          <a:p>
+            <a:r>
+              <a:rPr lang="en-US" sz="2600" dirty="0"/>
+              <a:t>Top countries: US, followed by Great Britain, Canada, Australia, then New Zealand and others</a:t>
+            </a:r>
+          </a:p>
+          <a:p>
+            <a:endParaRPr lang="en-US" dirty="0"/>
+          </a:p>
+        </p:txBody>
+      </p:sp>
+      <p:pic>
+        <p:nvPicPr>
+          <p:cNvPr id="5" name="Picture 4" descr="A screen shot of a computer&#10;&#10;AI-generated content may be incorrect.">
+            <a:extLst>
+              <a:ext uri="{FF2B5EF4-FFF2-40B4-BE49-F238E27FC236}">
+                <a16:creationId xmlns:a16="http://schemas.microsoft.com/office/drawing/2014/main" id="{735E77DC-43DD-6784-761E-ACB2B663CAE5}"/>
+              </a:ext>
+            </a:extLst>
+          </p:cNvPr>
+          <p:cNvPicPr>
+            <a:picLocks noChangeAspect="1"/>
+          </p:cNvPicPr>
+          <p:nvPr/>
+        </p:nvPicPr>
+        <p:blipFill>
+          <a:blip r:embed="rId2"/>
+          <a:stretch>
+            <a:fillRect/>
+          </a:stretch>
+        </p:blipFill>
+        <p:spPr>
+          <a:xfrm>
+            <a:off x="4910573" y="2396910"/>
+            <a:ext cx="5050291" cy="4461090"/>
+          </a:xfrm>
+          <a:prstGeom prst="rect">
+            <a:avLst/>
+          </a:prstGeom>
+        </p:spPr>
+      </p:pic>
+    </p:spTree>
+    <p:extLst>
+      <p:ext uri="{BB962C8B-B14F-4D97-AF65-F5344CB8AC3E}">
+        <p14:creationId xmlns:p14="http://schemas.microsoft.com/office/powerpoint/2010/main" val="3423169490"/>
+      </p:ext>
+    </p:extLst>
+  </p:cSld>
+  <p:clrMapOvr>
+    <a:masterClrMapping/>
+  </p:clrMapOvr>
+</p:sld>
+</file>
+
+<file path=ppt/slides/slide12.xml><?xml version="1.0" encoding="utf-8"?>
+<p:sld xmlns:a="http://schemas.openxmlformats.org/drawingml/2006/main" xmlns:r="http://schemas.openxmlformats.org/officeDocument/2006/relationships" xmlns:p="http://schemas.openxmlformats.org/presentationml/2006/main">
+  <p:cSld>
+    <p:spTree>
+      <p:nvGrpSpPr>
+        <p:cNvPr id="1" name=""/>
+        <p:cNvGrpSpPr/>
+        <p:nvPr/>
+      </p:nvGrpSpPr>
+      <p:grpSpPr>
+        <a:xfrm>
+          <a:off x="0" y="0"/>
+          <a:ext cx="0" cy="0"/>
+          <a:chOff x="0" y="0"/>
+          <a:chExt cx="0" cy="0"/>
+        </a:xfrm>
+      </p:grpSpPr>
+      <p:sp>
+        <p:nvSpPr>
+          <p:cNvPr id="2" name="Title 1">
+            <a:extLst>
+              <a:ext uri="{FF2B5EF4-FFF2-40B4-BE49-F238E27FC236}">
+                <a16:creationId xmlns:a16="http://schemas.microsoft.com/office/drawing/2014/main" id="{144C8950-D095-C7D0-B76B-6AA00D34E734}"/>
+              </a:ext>
+            </a:extLst>
+          </p:cNvPr>
+          <p:cNvSpPr>
+            <a:spLocks noGrp="1"/>
+          </p:cNvSpPr>
+          <p:nvPr>
+            <p:ph type="title"/>
+          </p:nvPr>
+        </p:nvSpPr>
+        <p:spPr/>
+        <p:txBody>
+          <a:bodyPr/>
+          <a:lstStyle/>
+          <a:p>
+            <a:r>
+              <a:rPr lang="en-US" dirty="0"/>
+              <a:t>Preview User Age Data</a:t>
+            </a:r>
+          </a:p>
+        </p:txBody>
+      </p:sp>
+      <p:sp>
+        <p:nvSpPr>
+          <p:cNvPr id="3" name="Content Placeholder 2">
+            <a:extLst>
+              <a:ext uri="{FF2B5EF4-FFF2-40B4-BE49-F238E27FC236}">
+                <a16:creationId xmlns:a16="http://schemas.microsoft.com/office/drawing/2014/main" id="{55E21ADE-63EF-1583-249C-6947C1F6CCB4}"/>
+              </a:ext>
+            </a:extLst>
+          </p:cNvPr>
+          <p:cNvSpPr>
+            <a:spLocks noGrp="1"/>
+          </p:cNvSpPr>
+          <p:nvPr>
+            <p:ph idx="1"/>
+          </p:nvPr>
+        </p:nvSpPr>
+        <p:spPr>
+          <a:xfrm>
+            <a:off x="2231136" y="2445488"/>
+            <a:ext cx="7729728" cy="3294539"/>
+          </a:xfrm>
+        </p:spPr>
+        <p:txBody>
+          <a:bodyPr>
+            <a:normAutofit/>
+          </a:bodyPr>
+          <a:lstStyle/>
+          <a:p>
+            <a:r>
+              <a:rPr lang="en-US" sz="2000" dirty="0"/>
+              <a:t>There are invalid ages (&gt; 100 or &lt;= 0), so let's remove them next</a:t>
+            </a:r>
+          </a:p>
+        </p:txBody>
+      </p:sp>
+      <p:pic>
+        <p:nvPicPr>
+          <p:cNvPr id="5" name="Picture 4" descr="A screenshot of a computer&#10;&#10;AI-generated content may be incorrect.">
+            <a:extLst>
+              <a:ext uri="{FF2B5EF4-FFF2-40B4-BE49-F238E27FC236}">
+                <a16:creationId xmlns:a16="http://schemas.microsoft.com/office/drawing/2014/main" id="{B57C34B4-5910-4441-B584-8BE0786F09FB}"/>
+              </a:ext>
+            </a:extLst>
+          </p:cNvPr>
+          <p:cNvPicPr>
+            <a:picLocks noChangeAspect="1"/>
+          </p:cNvPicPr>
+          <p:nvPr/>
+        </p:nvPicPr>
+        <p:blipFill>
+          <a:blip r:embed="rId2"/>
+          <a:stretch>
+            <a:fillRect/>
+          </a:stretch>
+        </p:blipFill>
+        <p:spPr>
+          <a:xfrm>
+            <a:off x="2374900" y="2982336"/>
+            <a:ext cx="3721100" cy="3721100"/>
+          </a:xfrm>
+          <a:prstGeom prst="rect">
+            <a:avLst/>
+          </a:prstGeom>
+        </p:spPr>
+      </p:pic>
+      <p:pic>
+        <p:nvPicPr>
+          <p:cNvPr id="7" name="Picture 6" descr="A screenshot of a computer&#10;&#10;AI-generated content may be incorrect.">
+            <a:extLst>
+              <a:ext uri="{FF2B5EF4-FFF2-40B4-BE49-F238E27FC236}">
+                <a16:creationId xmlns:a16="http://schemas.microsoft.com/office/drawing/2014/main" id="{58B9F46A-706E-4A38-2486-E8253DD0E1EF}"/>
+              </a:ext>
+            </a:extLst>
+          </p:cNvPr>
+          <p:cNvPicPr>
+            <a:picLocks noChangeAspect="1"/>
+          </p:cNvPicPr>
+          <p:nvPr/>
+        </p:nvPicPr>
+        <p:blipFill>
+          <a:blip r:embed="rId3"/>
+          <a:stretch>
+            <a:fillRect/>
+          </a:stretch>
+        </p:blipFill>
+        <p:spPr>
+          <a:xfrm>
+            <a:off x="6239764" y="3020977"/>
+            <a:ext cx="4658763" cy="3643818"/>
+          </a:xfrm>
+          <a:prstGeom prst="rect">
+            <a:avLst/>
+          </a:prstGeom>
+        </p:spPr>
+      </p:pic>
+    </p:spTree>
+    <p:extLst>
+      <p:ext uri="{BB962C8B-B14F-4D97-AF65-F5344CB8AC3E}">
+        <p14:creationId xmlns:p14="http://schemas.microsoft.com/office/powerpoint/2010/main" val="2014580743"/>
+      </p:ext>
+    </p:extLst>
+  </p:cSld>
+  <p:clrMapOvr>
+    <a:masterClrMapping/>
+  </p:clrMapOvr>
+</p:sld>
+</file>
+
+<file path=ppt/slides/slide13.xml><?xml version="1.0" encoding="utf-8"?>
+<p:sld xmlns:a="http://schemas.openxmlformats.org/drawingml/2006/main" xmlns:r="http://schemas.openxmlformats.org/officeDocument/2006/relationships" xmlns:p="http://schemas.openxmlformats.org/presentationml/2006/main">
+  <p:cSld>
+    <p:spTree>
+      <p:nvGrpSpPr>
+        <p:cNvPr id="1" name=""/>
+        <p:cNvGrpSpPr/>
+        <p:nvPr/>
+      </p:nvGrpSpPr>
+      <p:grpSpPr>
+        <a:xfrm>
+          <a:off x="0" y="0"/>
+          <a:ext cx="0" cy="0"/>
+          <a:chOff x="0" y="0"/>
+          <a:chExt cx="0" cy="0"/>
+        </a:xfrm>
+      </p:grpSpPr>
+      <p:sp>
+        <p:nvSpPr>
+          <p:cNvPr id="2" name="Title 1">
+            <a:extLst>
+              <a:ext uri="{FF2B5EF4-FFF2-40B4-BE49-F238E27FC236}">
+                <a16:creationId xmlns:a16="http://schemas.microsoft.com/office/drawing/2014/main" id="{736B9142-6F9F-62C0-80A3-1A5D11F0F60D}"/>
+              </a:ext>
+            </a:extLst>
+          </p:cNvPr>
+          <p:cNvSpPr>
+            <a:spLocks noGrp="1"/>
+          </p:cNvSpPr>
+          <p:nvPr>
+            <p:ph type="title"/>
+          </p:nvPr>
+        </p:nvSpPr>
+        <p:spPr/>
+        <p:txBody>
+          <a:bodyPr/>
+          <a:lstStyle/>
+          <a:p>
+            <a:r>
+              <a:rPr lang="en-US" dirty="0"/>
+              <a:t>User Counts by Age</a:t>
+            </a:r>
+          </a:p>
+        </p:txBody>
+      </p:sp>
+      <p:sp>
+        <p:nvSpPr>
+          <p:cNvPr id="3" name="Content Placeholder 2">
+            <a:extLst>
+              <a:ext uri="{FF2B5EF4-FFF2-40B4-BE49-F238E27FC236}">
+                <a16:creationId xmlns:a16="http://schemas.microsoft.com/office/drawing/2014/main" id="{1772CF24-C484-643A-F48E-D981A7B63118}"/>
+              </a:ext>
+            </a:extLst>
+          </p:cNvPr>
+          <p:cNvSpPr>
+            <a:spLocks noGrp="1"/>
+          </p:cNvSpPr>
+          <p:nvPr>
+            <p:ph idx="1"/>
+          </p:nvPr>
+        </p:nvSpPr>
+        <p:spPr>
+          <a:xfrm>
+            <a:off x="2231136" y="2638044"/>
+            <a:ext cx="3392963" cy="3101983"/>
+          </a:xfrm>
+        </p:spPr>
+        <p:txBody>
+          <a:bodyPr>
+            <a:normAutofit fontScale="92500" lnSpcReduction="10000"/>
+          </a:bodyPr>
+          <a:lstStyle/>
+          <a:p>
+            <a:r>
+              <a:rPr lang="en-US" sz="2400" dirty="0"/>
+              <a:t>Get and plot user counts by (valid) age</a:t>
+            </a:r>
+          </a:p>
+          <a:p>
+            <a:r>
+              <a:rPr lang="en-US" sz="2400" dirty="0"/>
+              <a:t>Most users (7,475 or 18%) are 25-29</a:t>
+            </a:r>
+          </a:p>
+          <a:p>
+            <a:r>
+              <a:rPr lang="en-US" sz="2400" dirty="0"/>
+              <a:t>There is a good number of users (380) aged 0-4</a:t>
+            </a:r>
+          </a:p>
+          <a:p>
+            <a:pPr lvl="1"/>
+            <a:r>
+              <a:rPr lang="en-US" sz="2000" dirty="0"/>
+              <a:t>Perhaps these users are parents tracking their baby's health</a:t>
+            </a:r>
+          </a:p>
+          <a:p>
+            <a:endParaRPr lang="en-US" sz="2400" dirty="0"/>
+          </a:p>
+        </p:txBody>
+      </p:sp>
+      <p:pic>
+        <p:nvPicPr>
+          <p:cNvPr id="5" name="Picture 4" descr="A screenshot of a computer screen&#10;&#10;AI-generated content may be incorrect.">
+            <a:extLst>
+              <a:ext uri="{FF2B5EF4-FFF2-40B4-BE49-F238E27FC236}">
+                <a16:creationId xmlns:a16="http://schemas.microsoft.com/office/drawing/2014/main" id="{386A63C9-25DC-5017-A9BC-12803F3DD19E}"/>
+              </a:ext>
+            </a:extLst>
+          </p:cNvPr>
+          <p:cNvPicPr>
+            <a:picLocks noChangeAspect="1"/>
+          </p:cNvPicPr>
+          <p:nvPr/>
+        </p:nvPicPr>
+        <p:blipFill>
+          <a:blip r:embed="rId2"/>
+          <a:stretch>
+            <a:fillRect/>
+          </a:stretch>
+        </p:blipFill>
+        <p:spPr>
+          <a:xfrm>
+            <a:off x="5624099" y="2173549"/>
+            <a:ext cx="4404246" cy="4684451"/>
+          </a:xfrm>
+          <a:prstGeom prst="rect">
+            <a:avLst/>
+          </a:prstGeom>
+        </p:spPr>
+      </p:pic>
+    </p:spTree>
+    <p:extLst>
+      <p:ext uri="{BB962C8B-B14F-4D97-AF65-F5344CB8AC3E}">
+        <p14:creationId xmlns:p14="http://schemas.microsoft.com/office/powerpoint/2010/main" val="1332582224"/>
+      </p:ext>
+    </p:extLst>
+  </p:cSld>
+  <p:clrMapOvr>
+    <a:masterClrMapping/>
+  </p:clrMapOvr>
+</p:sld>
+</file>
+
+<file path=ppt/slides/slide14.xml><?xml version="1.0" encoding="utf-8"?>
+<p:sld xmlns:a="http://schemas.openxmlformats.org/drawingml/2006/main" xmlns:r="http://schemas.openxmlformats.org/officeDocument/2006/relationships" xmlns:p="http://schemas.openxmlformats.org/presentationml/2006/main">
+  <p:cSld>
+    <p:spTree>
+      <p:nvGrpSpPr>
+        <p:cNvPr id="1" name=""/>
+        <p:cNvGrpSpPr/>
+        <p:nvPr/>
+      </p:nvGrpSpPr>
+      <p:grpSpPr>
+        <a:xfrm>
+          <a:off x="0" y="0"/>
+          <a:ext cx="0" cy="0"/>
+          <a:chOff x="0" y="0"/>
+          <a:chExt cx="0" cy="0"/>
+        </a:xfrm>
+      </p:grpSpPr>
+      <p:sp>
+        <p:nvSpPr>
+          <p:cNvPr id="2" name="Title 1">
+            <a:extLst>
+              <a:ext uri="{FF2B5EF4-FFF2-40B4-BE49-F238E27FC236}">
+                <a16:creationId xmlns:a16="http://schemas.microsoft.com/office/drawing/2014/main" id="{9322EAE4-30C2-9E37-3D5E-3FDE9BCC62B1}"/>
+              </a:ext>
+            </a:extLst>
+          </p:cNvPr>
+          <p:cNvSpPr>
+            <a:spLocks noGrp="1"/>
+          </p:cNvSpPr>
+          <p:nvPr>
+            <p:ph type="title"/>
+          </p:nvPr>
+        </p:nvSpPr>
+        <p:spPr/>
+        <p:txBody>
+          <a:bodyPr/>
+          <a:lstStyle/>
+          <a:p>
+            <a:r>
+              <a:rPr lang="en-US" dirty="0"/>
+              <a:t>Get Check-in Dates</a:t>
+            </a:r>
+          </a:p>
+        </p:txBody>
+      </p:sp>
+      <p:sp>
+        <p:nvSpPr>
+          <p:cNvPr id="3" name="Content Placeholder 2">
+            <a:extLst>
+              <a:ext uri="{FF2B5EF4-FFF2-40B4-BE49-F238E27FC236}">
+                <a16:creationId xmlns:a16="http://schemas.microsoft.com/office/drawing/2014/main" id="{A2104331-0DA9-67DC-32F6-B1FADFED70F5}"/>
+              </a:ext>
+            </a:extLst>
+          </p:cNvPr>
+          <p:cNvSpPr>
+            <a:spLocks noGrp="1"/>
+          </p:cNvSpPr>
+          <p:nvPr>
+            <p:ph idx="1"/>
+          </p:nvPr>
+        </p:nvSpPr>
+        <p:spPr>
+          <a:xfrm>
+            <a:off x="2231136" y="2638044"/>
+            <a:ext cx="4478008" cy="3101983"/>
+          </a:xfrm>
+        </p:spPr>
+        <p:txBody>
+          <a:bodyPr/>
+          <a:lstStyle/>
+          <a:p>
+            <a:r>
+              <a:rPr lang="en-US" sz="2800" dirty="0"/>
+              <a:t>Get subset of data with unique check-in dates per user</a:t>
+            </a:r>
+          </a:p>
+          <a:p>
+            <a:r>
+              <a:rPr lang="en-US" sz="2800" dirty="0"/>
+              <a:t>Convert ‘</a:t>
+            </a:r>
+            <a:r>
+              <a:rPr lang="en-US" sz="2800" dirty="0" err="1"/>
+              <a:t>checkin_date</a:t>
+            </a:r>
+            <a:r>
+              <a:rPr lang="en-US" sz="2800" dirty="0"/>
+              <a:t>’ to datetime and set it as index</a:t>
+            </a:r>
+          </a:p>
+        </p:txBody>
+      </p:sp>
+      <p:pic>
+        <p:nvPicPr>
+          <p:cNvPr id="5" name="Picture 4" descr="A screenshot of a computer&#10;&#10;AI-generated content may be incorrect.">
+            <a:extLst>
+              <a:ext uri="{FF2B5EF4-FFF2-40B4-BE49-F238E27FC236}">
+                <a16:creationId xmlns:a16="http://schemas.microsoft.com/office/drawing/2014/main" id="{8B9F0F8B-B964-DB69-4369-2F2CDCFBC8FA}"/>
+              </a:ext>
+            </a:extLst>
+          </p:cNvPr>
+          <p:cNvPicPr>
+            <a:picLocks noChangeAspect="1"/>
+          </p:cNvPicPr>
+          <p:nvPr/>
+        </p:nvPicPr>
+        <p:blipFill>
+          <a:blip r:embed="rId2"/>
+          <a:stretch>
+            <a:fillRect/>
+          </a:stretch>
+        </p:blipFill>
+        <p:spPr>
+          <a:xfrm>
+            <a:off x="6709144" y="2153412"/>
+            <a:ext cx="5445310" cy="4704588"/>
+          </a:xfrm>
+          <a:prstGeom prst="rect">
+            <a:avLst/>
+          </a:prstGeom>
+        </p:spPr>
+      </p:pic>
+    </p:spTree>
+    <p:extLst>
+      <p:ext uri="{BB962C8B-B14F-4D97-AF65-F5344CB8AC3E}">
+        <p14:creationId xmlns:p14="http://schemas.microsoft.com/office/powerpoint/2010/main" val="2864743017"/>
+      </p:ext>
+    </p:extLst>
+  </p:cSld>
+  <p:clrMapOvr>
+    <a:masterClrMapping/>
+  </p:clrMapOvr>
+</p:sld>
+</file>
+
+<file path=ppt/slides/slide15.xml><?xml version="1.0" encoding="utf-8"?>
+<p:sld xmlns:a="http://schemas.openxmlformats.org/drawingml/2006/main" xmlns:r="http://schemas.openxmlformats.org/officeDocument/2006/relationships" xmlns:p="http://schemas.openxmlformats.org/presentationml/2006/main">
+  <p:cSld>
+    <p:spTree>
+      <p:nvGrpSpPr>
+        <p:cNvPr id="1" name=""/>
+        <p:cNvGrpSpPr/>
+        <p:nvPr/>
+      </p:nvGrpSpPr>
+      <p:grpSpPr>
+        <a:xfrm>
+          <a:off x="0" y="0"/>
+          <a:ext cx="0" cy="0"/>
+          <a:chOff x="0" y="0"/>
+          <a:chExt cx="0" cy="0"/>
+        </a:xfrm>
+      </p:grpSpPr>
+      <p:sp>
+        <p:nvSpPr>
+          <p:cNvPr id="2" name="Title 1">
+            <a:extLst>
+              <a:ext uri="{FF2B5EF4-FFF2-40B4-BE49-F238E27FC236}">
+                <a16:creationId xmlns:a16="http://schemas.microsoft.com/office/drawing/2014/main" id="{3A98EF5C-F893-D6FB-B957-DA0EC2C72035}"/>
+              </a:ext>
+            </a:extLst>
+          </p:cNvPr>
+          <p:cNvSpPr>
+            <a:spLocks noGrp="1"/>
+          </p:cNvSpPr>
+          <p:nvPr>
+            <p:ph type="title"/>
+          </p:nvPr>
+        </p:nvSpPr>
+        <p:spPr/>
+        <p:txBody>
+          <a:bodyPr/>
+          <a:lstStyle/>
+          <a:p>
+            <a:r>
+              <a:rPr lang="en-US" dirty="0"/>
+              <a:t>Check-in counts by month</a:t>
+            </a:r>
+          </a:p>
+        </p:txBody>
+      </p:sp>
+      <p:sp>
+        <p:nvSpPr>
+          <p:cNvPr id="3" name="Content Placeholder 2">
+            <a:extLst>
+              <a:ext uri="{FF2B5EF4-FFF2-40B4-BE49-F238E27FC236}">
+                <a16:creationId xmlns:a16="http://schemas.microsoft.com/office/drawing/2014/main" id="{3BF54FA5-589A-D379-0ECA-8189D1AF221B}"/>
+              </a:ext>
+            </a:extLst>
+          </p:cNvPr>
+          <p:cNvSpPr>
+            <a:spLocks noGrp="1"/>
+          </p:cNvSpPr>
+          <p:nvPr>
+            <p:ph idx="1"/>
+          </p:nvPr>
+        </p:nvSpPr>
+        <p:spPr>
+          <a:xfrm>
+            <a:off x="2231136" y="2395728"/>
+            <a:ext cx="4623509" cy="4219956"/>
+          </a:xfrm>
+        </p:spPr>
+        <p:txBody>
+          <a:bodyPr>
+            <a:normAutofit fontScale="92500" lnSpcReduction="10000"/>
+          </a:bodyPr>
+          <a:lstStyle/>
+          <a:p>
+            <a:r>
+              <a:rPr lang="en-US" sz="2400" dirty="0"/>
+              <a:t>Get check-in counts by month with .resample(‘ME’), or “Month End”</a:t>
+            </a:r>
+          </a:p>
+          <a:p>
+            <a:r>
+              <a:rPr lang="en-US" sz="2400" dirty="0"/>
+              <a:t>Plot with </a:t>
+            </a:r>
+            <a:r>
+              <a:rPr lang="en-US" sz="2400" dirty="0" err="1"/>
+              <a:t>Plotly</a:t>
+            </a:r>
+            <a:r>
+              <a:rPr lang="en-US" sz="2400" dirty="0"/>
+              <a:t> express line chart</a:t>
+            </a:r>
+          </a:p>
+          <a:p>
+            <a:r>
+              <a:rPr lang="en-US" sz="2400" dirty="0"/>
+              <a:t>The highest number of check-ins occurred in Jan 2019</a:t>
+            </a:r>
+          </a:p>
+          <a:p>
+            <a:pPr lvl="1"/>
+            <a:r>
+              <a:rPr lang="en-US" sz="2000" dirty="0"/>
+              <a:t>This may be due to excitement for the new year and New Year's resolutions</a:t>
+            </a:r>
+          </a:p>
+          <a:p>
+            <a:r>
+              <a:rPr lang="en-US" sz="2400" dirty="0"/>
+              <a:t>There is a </a:t>
+            </a:r>
+            <a:r>
+              <a:rPr lang="en-US" sz="2400" dirty="0" err="1"/>
+              <a:t>dropoff</a:t>
+            </a:r>
+            <a:r>
+              <a:rPr lang="en-US" sz="2400" dirty="0"/>
+              <a:t> in check-in counts in Dec 2019</a:t>
+            </a:r>
+          </a:p>
+          <a:p>
+            <a:pPr lvl="1"/>
+            <a:r>
+              <a:rPr lang="en-US" sz="2000" dirty="0"/>
+              <a:t>This may be due to the dataset ending with only partial data for the final month</a:t>
+            </a:r>
+          </a:p>
+          <a:p>
+            <a:endParaRPr lang="en-US" sz="2400" dirty="0"/>
+          </a:p>
+        </p:txBody>
+      </p:sp>
+      <p:pic>
+        <p:nvPicPr>
+          <p:cNvPr id="5" name="Picture 4" descr="A screen shot of a graph&#10;&#10;AI-generated content may be incorrect.">
+            <a:extLst>
+              <a:ext uri="{FF2B5EF4-FFF2-40B4-BE49-F238E27FC236}">
+                <a16:creationId xmlns:a16="http://schemas.microsoft.com/office/drawing/2014/main" id="{AF870DBB-D43A-322F-F60E-D609239EBF9D}"/>
+              </a:ext>
+            </a:extLst>
+          </p:cNvPr>
+          <p:cNvPicPr>
+            <a:picLocks noChangeAspect="1"/>
+          </p:cNvPicPr>
+          <p:nvPr/>
+        </p:nvPicPr>
+        <p:blipFill>
+          <a:blip r:embed="rId2"/>
+          <a:stretch>
+            <a:fillRect/>
+          </a:stretch>
+        </p:blipFill>
+        <p:spPr>
+          <a:xfrm>
+            <a:off x="6854646" y="2153412"/>
+            <a:ext cx="4560879" cy="4704588"/>
+          </a:xfrm>
+          <a:prstGeom prst="rect">
+            <a:avLst/>
+          </a:prstGeom>
+        </p:spPr>
+      </p:pic>
+    </p:spTree>
+    <p:extLst>
+      <p:ext uri="{BB962C8B-B14F-4D97-AF65-F5344CB8AC3E}">
+        <p14:creationId xmlns:p14="http://schemas.microsoft.com/office/powerpoint/2010/main" val="1071735173"/>
+      </p:ext>
+    </p:extLst>
+  </p:cSld>
+  <p:clrMapOvr>
+    <a:masterClrMapping/>
+  </p:clrMapOvr>
+</p:sld>
+</file>
+
+<file path=ppt/slides/slide16.xml><?xml version="1.0" encoding="utf-8"?>
+<p:sld xmlns:a="http://schemas.openxmlformats.org/drawingml/2006/main" xmlns:r="http://schemas.openxmlformats.org/officeDocument/2006/relationships" xmlns:p="http://schemas.openxmlformats.org/presentationml/2006/main">
+  <p:cSld>
+    <p:spTree>
+      <p:nvGrpSpPr>
+        <p:cNvPr id="1" name=""/>
+        <p:cNvGrpSpPr/>
+        <p:nvPr/>
+      </p:nvGrpSpPr>
+      <p:grpSpPr>
+        <a:xfrm>
+          <a:off x="0" y="0"/>
+          <a:ext cx="0" cy="0"/>
+          <a:chOff x="0" y="0"/>
+          <a:chExt cx="0" cy="0"/>
+        </a:xfrm>
+      </p:grpSpPr>
+      <p:sp>
+        <p:nvSpPr>
+          <p:cNvPr id="2" name="Title 1">
+            <a:extLst>
+              <a:ext uri="{FF2B5EF4-FFF2-40B4-BE49-F238E27FC236}">
+                <a16:creationId xmlns:a16="http://schemas.microsoft.com/office/drawing/2014/main" id="{7AA2DB49-5248-981D-4671-A5CD89F0FDB8}"/>
+              </a:ext>
+            </a:extLst>
+          </p:cNvPr>
+          <p:cNvSpPr>
+            <a:spLocks noGrp="1"/>
+          </p:cNvSpPr>
+          <p:nvPr>
+            <p:ph type="title"/>
+          </p:nvPr>
+        </p:nvSpPr>
+        <p:spPr/>
+        <p:txBody>
+          <a:bodyPr/>
+          <a:lstStyle/>
+          <a:p>
+            <a:r>
+              <a:rPr lang="en-US" dirty="0"/>
+              <a:t>Trackable Types</a:t>
+            </a:r>
+          </a:p>
+        </p:txBody>
+      </p:sp>
+      <p:sp>
+        <p:nvSpPr>
+          <p:cNvPr id="3" name="Content Placeholder 2">
+            <a:extLst>
+              <a:ext uri="{FF2B5EF4-FFF2-40B4-BE49-F238E27FC236}">
+                <a16:creationId xmlns:a16="http://schemas.microsoft.com/office/drawing/2014/main" id="{CF7FA434-BD48-91DA-D84F-0CF87C9A1ADA}"/>
+              </a:ext>
+            </a:extLst>
+          </p:cNvPr>
+          <p:cNvSpPr>
+            <a:spLocks noGrp="1"/>
+          </p:cNvSpPr>
+          <p:nvPr>
+            <p:ph idx="1"/>
+          </p:nvPr>
+        </p:nvSpPr>
+        <p:spPr>
+          <a:xfrm>
+            <a:off x="2231136" y="2302268"/>
+            <a:ext cx="3864864" cy="4034737"/>
+          </a:xfrm>
+        </p:spPr>
+        <p:txBody>
+          <a:bodyPr>
+            <a:normAutofit/>
+          </a:bodyPr>
+          <a:lstStyle/>
+          <a:p>
+            <a:r>
+              <a:rPr lang="en-US" sz="2400" dirty="0"/>
+              <a:t>Get trackable type counts with sorted (descending) </a:t>
+            </a:r>
+            <a:r>
+              <a:rPr lang="en-US" sz="2400" dirty="0" err="1"/>
+              <a:t>groupby</a:t>
+            </a:r>
+            <a:r>
+              <a:rPr lang="en-US" sz="2400" dirty="0"/>
+              <a:t>() counts</a:t>
+            </a:r>
+          </a:p>
+          <a:p>
+            <a:r>
+              <a:rPr lang="en-US" sz="2400" dirty="0"/>
+              <a:t>Plot with </a:t>
+            </a:r>
+            <a:r>
+              <a:rPr lang="en-US" sz="2400" dirty="0" err="1"/>
+              <a:t>Plotly</a:t>
+            </a:r>
+            <a:r>
+              <a:rPr lang="en-US" sz="2400" dirty="0"/>
+              <a:t> express pie chart</a:t>
+            </a:r>
+          </a:p>
+          <a:p>
+            <a:r>
+              <a:rPr lang="en-US" sz="2400" dirty="0"/>
+              <a:t>Top trackable types: Symptom, followed by Weather, Condition, Treatment, Food, then Tag and HBI</a:t>
+            </a:r>
+          </a:p>
+          <a:p>
+            <a:endParaRPr lang="en-US" sz="2400" dirty="0"/>
+          </a:p>
+        </p:txBody>
+      </p:sp>
+      <p:pic>
+        <p:nvPicPr>
+          <p:cNvPr id="5" name="Picture 4">
+            <a:extLst>
+              <a:ext uri="{FF2B5EF4-FFF2-40B4-BE49-F238E27FC236}">
+                <a16:creationId xmlns:a16="http://schemas.microsoft.com/office/drawing/2014/main" id="{B4B6DA3D-4F4F-C758-9B87-F300E86B83C8}"/>
+              </a:ext>
+            </a:extLst>
+          </p:cNvPr>
+          <p:cNvPicPr>
+            <a:picLocks noChangeAspect="1"/>
+          </p:cNvPicPr>
+          <p:nvPr/>
+        </p:nvPicPr>
+        <p:blipFill>
+          <a:blip r:embed="rId2"/>
+          <a:stretch>
+            <a:fillRect/>
+          </a:stretch>
+        </p:blipFill>
+        <p:spPr>
+          <a:xfrm>
+            <a:off x="6096000" y="2153412"/>
+            <a:ext cx="4782349" cy="4704588"/>
+          </a:xfrm>
+          <a:prstGeom prst="rect">
+            <a:avLst/>
+          </a:prstGeom>
+        </p:spPr>
+      </p:pic>
+    </p:spTree>
+    <p:extLst>
+      <p:ext uri="{BB962C8B-B14F-4D97-AF65-F5344CB8AC3E}">
+        <p14:creationId xmlns:p14="http://schemas.microsoft.com/office/powerpoint/2010/main" val="988637258"/>
+      </p:ext>
+    </p:extLst>
+  </p:cSld>
+  <p:clrMapOvr>
+    <a:masterClrMapping/>
+  </p:clrMapOvr>
+</p:sld>
+</file>
+
+<file path=ppt/slides/slide17.xml><?xml version="1.0" encoding="utf-8"?>
+<p:sld xmlns:a="http://schemas.openxmlformats.org/drawingml/2006/main" xmlns:r="http://schemas.openxmlformats.org/officeDocument/2006/relationships" xmlns:p="http://schemas.openxmlformats.org/presentationml/2006/main">
+  <p:cSld>
+    <p:spTree>
+      <p:nvGrpSpPr>
+        <p:cNvPr id="1" name=""/>
+        <p:cNvGrpSpPr/>
+        <p:nvPr/>
+      </p:nvGrpSpPr>
+      <p:grpSpPr>
+        <a:xfrm>
+          <a:off x="0" y="0"/>
+          <a:ext cx="0" cy="0"/>
+          <a:chOff x="0" y="0"/>
+          <a:chExt cx="0" cy="0"/>
+        </a:xfrm>
+      </p:grpSpPr>
+      <p:sp>
+        <p:nvSpPr>
+          <p:cNvPr id="2" name="Title 1">
+            <a:extLst>
+              <a:ext uri="{FF2B5EF4-FFF2-40B4-BE49-F238E27FC236}">
+                <a16:creationId xmlns:a16="http://schemas.microsoft.com/office/drawing/2014/main" id="{C311E82E-4756-890A-78A1-A4C17E290EFD}"/>
+              </a:ext>
+            </a:extLst>
+          </p:cNvPr>
+          <p:cNvSpPr>
+            <a:spLocks noGrp="1"/>
+          </p:cNvSpPr>
+          <p:nvPr>
+            <p:ph type="title"/>
+          </p:nvPr>
+        </p:nvSpPr>
+        <p:spPr/>
+        <p:txBody>
+          <a:bodyPr/>
+          <a:lstStyle/>
+          <a:p>
+            <a:r>
+              <a:rPr lang="en-US" dirty="0"/>
+              <a:t>Get Trackable Names</a:t>
+            </a:r>
+          </a:p>
+        </p:txBody>
+      </p:sp>
+      <p:sp>
+        <p:nvSpPr>
+          <p:cNvPr id="3" name="Content Placeholder 2">
+            <a:extLst>
+              <a:ext uri="{FF2B5EF4-FFF2-40B4-BE49-F238E27FC236}">
+                <a16:creationId xmlns:a16="http://schemas.microsoft.com/office/drawing/2014/main" id="{278ADC84-1CE7-615D-F72B-0DB19B73EE2C}"/>
+              </a:ext>
+            </a:extLst>
+          </p:cNvPr>
+          <p:cNvSpPr>
+            <a:spLocks noGrp="1"/>
+          </p:cNvSpPr>
+          <p:nvPr>
+            <p:ph idx="1"/>
+          </p:nvPr>
+        </p:nvSpPr>
+        <p:spPr>
+          <a:xfrm>
+            <a:off x="2231136" y="2153412"/>
+            <a:ext cx="8592808" cy="1504189"/>
+          </a:xfrm>
+        </p:spPr>
+        <p:txBody>
+          <a:bodyPr>
+            <a:normAutofit/>
+          </a:bodyPr>
+          <a:lstStyle/>
+          <a:p>
+            <a:r>
+              <a:rPr lang="en-US" sz="2000" dirty="0"/>
+              <a:t>Get trackable names with sorted (descending) </a:t>
+            </a:r>
+            <a:r>
+              <a:rPr lang="en-US" sz="2000" dirty="0" err="1"/>
+              <a:t>groupby</a:t>
+            </a:r>
+            <a:r>
+              <a:rPr lang="en-US" sz="2000" dirty="0"/>
+              <a:t>() counts</a:t>
+            </a:r>
+          </a:p>
+          <a:p>
+            <a:r>
+              <a:rPr lang="en-US" sz="2000" dirty="0"/>
+              <a:t>Let's drop Weather trackables, which are pulled via API and not user input</a:t>
+            </a:r>
+          </a:p>
+          <a:p>
+            <a:endParaRPr lang="en-US" sz="2000" dirty="0"/>
+          </a:p>
+        </p:txBody>
+      </p:sp>
+      <p:pic>
+        <p:nvPicPr>
+          <p:cNvPr id="7" name="Picture 6" descr="A screen shot of a computer&#10;&#10;AI-generated content may be incorrect.">
+            <a:extLst>
+              <a:ext uri="{FF2B5EF4-FFF2-40B4-BE49-F238E27FC236}">
+                <a16:creationId xmlns:a16="http://schemas.microsoft.com/office/drawing/2014/main" id="{766981D8-BB70-7AC1-2A04-F663A62EED98}"/>
+              </a:ext>
+            </a:extLst>
+          </p:cNvPr>
+          <p:cNvPicPr>
+            <a:picLocks noChangeAspect="1"/>
+          </p:cNvPicPr>
+          <p:nvPr/>
+        </p:nvPicPr>
+        <p:blipFill>
+          <a:blip r:embed="rId2"/>
+          <a:stretch>
+            <a:fillRect/>
+          </a:stretch>
+        </p:blipFill>
+        <p:spPr>
+          <a:xfrm>
+            <a:off x="1368056" y="3116855"/>
+            <a:ext cx="5342789" cy="3676673"/>
+          </a:xfrm>
+          <a:prstGeom prst="rect">
+            <a:avLst/>
+          </a:prstGeom>
+        </p:spPr>
+      </p:pic>
+      <p:pic>
+        <p:nvPicPr>
+          <p:cNvPr id="8" name="Picture 7" descr="A screen shot of a computer&#10;&#10;AI-generated content may be incorrect.">
+            <a:extLst>
+              <a:ext uri="{FF2B5EF4-FFF2-40B4-BE49-F238E27FC236}">
+                <a16:creationId xmlns:a16="http://schemas.microsoft.com/office/drawing/2014/main" id="{ABC622C0-70E6-284D-0DF9-2741F87A7A87}"/>
+              </a:ext>
+            </a:extLst>
+          </p:cNvPr>
+          <p:cNvPicPr>
+            <a:picLocks noChangeAspect="1"/>
+          </p:cNvPicPr>
+          <p:nvPr/>
+        </p:nvPicPr>
+        <p:blipFill>
+          <a:blip r:embed="rId3"/>
+          <a:stretch>
+            <a:fillRect/>
+          </a:stretch>
+        </p:blipFill>
+        <p:spPr>
+          <a:xfrm>
+            <a:off x="6995371" y="3052386"/>
+            <a:ext cx="4874958" cy="3805612"/>
+          </a:xfrm>
+          <a:prstGeom prst="rect">
+            <a:avLst/>
+          </a:prstGeom>
+        </p:spPr>
+      </p:pic>
+    </p:spTree>
+    <p:extLst>
+      <p:ext uri="{BB962C8B-B14F-4D97-AF65-F5344CB8AC3E}">
+        <p14:creationId xmlns:p14="http://schemas.microsoft.com/office/powerpoint/2010/main" val="1891194676"/>
+      </p:ext>
+    </p:extLst>
+  </p:cSld>
+  <p:clrMapOvr>
+    <a:masterClrMapping/>
+  </p:clrMapOvr>
+</p:sld>
+</file>
+
+<file path=ppt/slides/slide18.xml><?xml version="1.0" encoding="utf-8"?>
+<p:sld xmlns:a="http://schemas.openxmlformats.org/drawingml/2006/main" xmlns:r="http://schemas.openxmlformats.org/officeDocument/2006/relationships" xmlns:p="http://schemas.openxmlformats.org/presentationml/2006/main">
+  <p:cSld>
+    <p:spTree>
+      <p:nvGrpSpPr>
+        <p:cNvPr id="1" name=""/>
+        <p:cNvGrpSpPr/>
+        <p:nvPr/>
+      </p:nvGrpSpPr>
+      <p:grpSpPr>
+        <a:xfrm>
+          <a:off x="0" y="0"/>
+          <a:ext cx="0" cy="0"/>
+          <a:chOff x="0" y="0"/>
+          <a:chExt cx="0" cy="0"/>
+        </a:xfrm>
+      </p:grpSpPr>
+      <p:sp>
+        <p:nvSpPr>
+          <p:cNvPr id="2" name="Title 1">
+            <a:extLst>
+              <a:ext uri="{FF2B5EF4-FFF2-40B4-BE49-F238E27FC236}">
+                <a16:creationId xmlns:a16="http://schemas.microsoft.com/office/drawing/2014/main" id="{F8A9D085-32B7-5A70-B8B0-EED086F4EC60}"/>
+              </a:ext>
+            </a:extLst>
+          </p:cNvPr>
+          <p:cNvSpPr>
+            <a:spLocks noGrp="1"/>
+          </p:cNvSpPr>
+          <p:nvPr>
+            <p:ph type="title"/>
+          </p:nvPr>
+        </p:nvSpPr>
+        <p:spPr/>
+        <p:txBody>
+          <a:bodyPr/>
+          <a:lstStyle/>
+          <a:p>
+            <a:r>
+              <a:rPr lang="en-US" dirty="0"/>
+              <a:t>Top 15 Trackable Names</a:t>
+            </a:r>
+          </a:p>
+        </p:txBody>
+      </p:sp>
+      <p:sp>
+        <p:nvSpPr>
+          <p:cNvPr id="3" name="Content Placeholder 2">
+            <a:extLst>
+              <a:ext uri="{FF2B5EF4-FFF2-40B4-BE49-F238E27FC236}">
+                <a16:creationId xmlns:a16="http://schemas.microsoft.com/office/drawing/2014/main" id="{BD4F9717-4FB5-29B5-422C-0718DDC7C93B}"/>
+              </a:ext>
+            </a:extLst>
+          </p:cNvPr>
+          <p:cNvSpPr>
+            <a:spLocks noGrp="1"/>
+          </p:cNvSpPr>
+          <p:nvPr>
+            <p:ph idx="1"/>
+          </p:nvPr>
+        </p:nvSpPr>
+        <p:spPr>
+          <a:xfrm>
+            <a:off x="2231136" y="2638044"/>
+            <a:ext cx="3647790" cy="3101983"/>
+          </a:xfrm>
+        </p:spPr>
+        <p:txBody>
+          <a:bodyPr>
+            <a:normAutofit/>
+          </a:bodyPr>
+          <a:lstStyle/>
+          <a:p>
+            <a:r>
+              <a:rPr lang="en-US" sz="2400" dirty="0"/>
+              <a:t>Plot with </a:t>
+            </a:r>
+            <a:r>
+              <a:rPr lang="en-US" sz="2400" dirty="0" err="1"/>
+              <a:t>Plotly</a:t>
+            </a:r>
+            <a:r>
+              <a:rPr lang="en-US" sz="2400" dirty="0"/>
+              <a:t> pie chart</a:t>
+            </a:r>
+          </a:p>
+          <a:p>
+            <a:r>
+              <a:rPr lang="en-US" sz="2400" dirty="0"/>
+              <a:t>The top trackable names: Headache, followed by Anxiety, Fatigue, Depression, and then Nausea and others</a:t>
+            </a:r>
+          </a:p>
+          <a:p>
+            <a:endParaRPr lang="en-US" sz="2400" dirty="0"/>
+          </a:p>
+        </p:txBody>
+      </p:sp>
+      <p:pic>
+        <p:nvPicPr>
+          <p:cNvPr id="7" name="Picture 6" descr="A screen shot of a computer&#10;&#10;AI-generated content may be incorrect.">
+            <a:extLst>
+              <a:ext uri="{FF2B5EF4-FFF2-40B4-BE49-F238E27FC236}">
+                <a16:creationId xmlns:a16="http://schemas.microsoft.com/office/drawing/2014/main" id="{9100F52D-A316-2AFC-0AFC-E3CFF115AC12}"/>
+              </a:ext>
+            </a:extLst>
+          </p:cNvPr>
+          <p:cNvPicPr>
+            <a:picLocks noChangeAspect="1"/>
+          </p:cNvPicPr>
+          <p:nvPr/>
+        </p:nvPicPr>
+        <p:blipFill>
+          <a:blip r:embed="rId2"/>
+          <a:stretch>
+            <a:fillRect/>
+          </a:stretch>
+        </p:blipFill>
+        <p:spPr>
+          <a:xfrm>
+            <a:off x="5878926" y="2153412"/>
+            <a:ext cx="6313074" cy="4704588"/>
+          </a:xfrm>
+          <a:prstGeom prst="rect">
+            <a:avLst/>
+          </a:prstGeom>
+        </p:spPr>
+      </p:pic>
+    </p:spTree>
+    <p:extLst>
+      <p:ext uri="{BB962C8B-B14F-4D97-AF65-F5344CB8AC3E}">
+        <p14:creationId xmlns:p14="http://schemas.microsoft.com/office/powerpoint/2010/main" val="699431918"/>
+      </p:ext>
+    </p:extLst>
+  </p:cSld>
+  <p:clrMapOvr>
+    <a:masterClrMapping/>
+  </p:clrMapOvr>
+</p:sld>
+</file>
+
+<file path=ppt/slides/slide19.xml><?xml version="1.0" encoding="utf-8"?>
+<p:sld xmlns:a="http://schemas.openxmlformats.org/drawingml/2006/main" xmlns:r="http://schemas.openxmlformats.org/officeDocument/2006/relationships" xmlns:p="http://schemas.openxmlformats.org/presentationml/2006/main">
+  <p:cSld>
+    <p:bg>
+      <p:bgPr>
+        <a:solidFill>
+          <a:schemeClr val="bg1"/>
+        </a:solidFill>
+        <a:effectLst/>
+      </p:bgPr>
+    </p:bg>
+    <p:spTree>
+      <p:nvGrpSpPr>
+        <p:cNvPr id="1" name="">
+          <a:extLst>
+            <a:ext uri="{FF2B5EF4-FFF2-40B4-BE49-F238E27FC236}">
+              <a16:creationId xmlns:a16="http://schemas.microsoft.com/office/drawing/2014/main" id="{D4E79579-4AFE-6419-0930-D48FBABA747C}"/>
+            </a:ext>
+          </a:extLst>
+        </p:cNvPr>
+        <p:cNvGrpSpPr/>
+        <p:nvPr/>
+      </p:nvGrpSpPr>
+      <p:grpSpPr>
+        <a:xfrm>
+          <a:off x="0" y="0"/>
+          <a:ext cx="0" cy="0"/>
+          <a:chOff x="0" y="0"/>
+          <a:chExt cx="0" cy="0"/>
+        </a:xfrm>
+      </p:grpSpPr>
+      <p:sp useBgFill="1">
+        <p:nvSpPr>
+          <p:cNvPr id="11" name="Rectangle 10">
+            <a:extLst>
+              <a:ext uri="{FF2B5EF4-FFF2-40B4-BE49-F238E27FC236}">
+                <a16:creationId xmlns:a16="http://schemas.microsoft.com/office/drawing/2014/main" id="{3ED03601-4724-4293-A32A-3A0879C5D491}"/>
+              </a:ext>
+              <a:ext uri="{C183D7F6-B498-43B3-948B-1728B52AA6E4}">
+                <adec:decorative xmlns:adec="http://schemas.microsoft.com/office/drawing/2017/decorative" val="1"/>
+              </a:ext>
+            </a:extLst>
+          </p:cNvPr>
+          <p:cNvSpPr>
+            <a:spLocks noGrp="1" noRot="1" noChangeAspect="1" noMove="1" noResize="1" noEditPoints="1" noAdjustHandles="1" noChangeArrowheads="1" noChangeShapeType="1" noTextEdit="1"/>
+          </p:cNvSpPr>
+          <p:nvPr>
+            <p:extLst>
+              <p:ext uri="{386F3935-93C4-4BCD-93E2-E3B085C9AB24}">
+                <p16:designElem xmlns:p16="http://schemas.microsoft.com/office/powerpoint/2015/main" val="1"/>
+              </p:ext>
+            </p:extLst>
+          </p:nvPr>
+        </p:nvSpPr>
+        <p:spPr>
+          <a:xfrm>
+            <a:off x="0" y="-2"/>
+            <a:ext cx="12192000" cy="6858002"/>
+          </a:xfrm>
+          <a:prstGeom prst="rect">
+            <a:avLst/>
+          </a:prstGeom>
+          <a:ln>
+            <a:noFill/>
+          </a:ln>
+        </p:spPr>
+        <p:style>
+          <a:lnRef idx="2">
+            <a:schemeClr val="accent1">
+              <a:shade val="50000"/>
+            </a:schemeClr>
+          </a:lnRef>
+          <a:fillRef idx="1">
+            <a:schemeClr val="accent1"/>
+          </a:fillRef>
+          <a:effectRef idx="0">
+            <a:schemeClr val="accent1"/>
+          </a:effectRef>
+          <a:fontRef idx="minor">
+            <a:schemeClr val="lt1"/>
+          </a:fontRef>
+        </p:style>
+        <p:txBody>
+          <a:bodyPr rtlCol="0" anchor="ctr"/>
+          <a:lstStyle/>
+          <a:p>
+            <a:pPr algn="ctr"/>
+            <a:endParaRPr lang="en-US"/>
+          </a:p>
+        </p:txBody>
+      </p:sp>
+      <p:sp>
+        <p:nvSpPr>
+          <p:cNvPr id="13" name="Rectangle 12">
+            <a:extLst>
+              <a:ext uri="{FF2B5EF4-FFF2-40B4-BE49-F238E27FC236}">
+                <a16:creationId xmlns:a16="http://schemas.microsoft.com/office/drawing/2014/main" id="{5E433AC3-E189-483B-9E8C-DFD5D2A18641}"/>
+              </a:ext>
+              <a:ext uri="{C183D7F6-B498-43B3-948B-1728B52AA6E4}">
+                <adec:decorative xmlns:adec="http://schemas.microsoft.com/office/drawing/2017/decorative" val="1"/>
+              </a:ext>
+            </a:extLst>
+          </p:cNvPr>
+          <p:cNvSpPr>
+            <a:spLocks noGrp="1" noRot="1" noChangeAspect="1" noMove="1" noResize="1" noEditPoints="1" noAdjustHandles="1" noChangeArrowheads="1" noChangeShapeType="1" noTextEdit="1"/>
+          </p:cNvSpPr>
+          <p:nvPr>
+            <p:extLst>
+              <p:ext uri="{386F3935-93C4-4BCD-93E2-E3B085C9AB24}">
+                <p16:designElem xmlns:p16="http://schemas.microsoft.com/office/powerpoint/2015/main" val="1"/>
+              </p:ext>
+            </p:extLst>
+          </p:nvPr>
+        </p:nvSpPr>
+        <p:spPr>
+          <a:xfrm>
+            <a:off x="0" y="4918509"/>
+            <a:ext cx="12192000" cy="1939491"/>
+          </a:xfrm>
+          <a:prstGeom prst="rect">
+            <a:avLst/>
+          </a:prstGeom>
+          <a:solidFill>
+            <a:schemeClr val="accent2"/>
+          </a:solidFill>
+          <a:ln>
+            <a:noFill/>
+          </a:ln>
+        </p:spPr>
+        <p:style>
+          <a:lnRef idx="2">
+            <a:schemeClr val="accent1">
+              <a:shade val="50000"/>
+            </a:schemeClr>
+          </a:lnRef>
+          <a:fillRef idx="1">
+            <a:schemeClr val="accent1"/>
+          </a:fillRef>
+          <a:effectRef idx="0">
+            <a:schemeClr val="accent1"/>
+          </a:effectRef>
+          <a:fontRef idx="minor">
+            <a:schemeClr val="lt1"/>
+          </a:fontRef>
+        </p:style>
+        <p:txBody>
+          <a:bodyPr rtlCol="0" anchor="ctr"/>
+          <a:lstStyle/>
+          <a:p>
+            <a:pPr algn="ctr"/>
+            <a:endParaRPr lang="en-US"/>
+          </a:p>
+        </p:txBody>
+      </p:sp>
+      <p:sp>
+        <p:nvSpPr>
+          <p:cNvPr id="2" name="Title 1">
+            <a:extLst>
+              <a:ext uri="{FF2B5EF4-FFF2-40B4-BE49-F238E27FC236}">
+                <a16:creationId xmlns:a16="http://schemas.microsoft.com/office/drawing/2014/main" id="{10C2E45B-7516-FF5D-1BAD-73E2B497DD5B}"/>
+              </a:ext>
+            </a:extLst>
+          </p:cNvPr>
+          <p:cNvSpPr>
+            <a:spLocks noGrp="1"/>
+          </p:cNvSpPr>
+          <p:nvPr>
+            <p:ph type="title"/>
+          </p:nvPr>
+        </p:nvSpPr>
+        <p:spPr>
+          <a:xfrm>
+            <a:off x="1600200" y="4269282"/>
+            <a:ext cx="8991600" cy="1264762"/>
+          </a:xfrm>
+        </p:spPr>
+        <p:txBody>
+          <a:bodyPr vert="horz" lIns="274320" tIns="182880" rIns="274320" bIns="182880" rtlCol="0" anchor="ctr" anchorCtr="1">
+            <a:normAutofit/>
+          </a:bodyPr>
+          <a:lstStyle/>
+          <a:p>
+            <a:r>
+              <a:rPr lang="en-US" sz="3200" dirty="0"/>
+              <a:t>Data Preprocessing</a:t>
+            </a:r>
+          </a:p>
+        </p:txBody>
+      </p:sp>
+      <p:sp>
+        <p:nvSpPr>
+          <p:cNvPr id="4" name="Text Placeholder 3">
+            <a:extLst>
+              <a:ext uri="{FF2B5EF4-FFF2-40B4-BE49-F238E27FC236}">
+                <a16:creationId xmlns:a16="http://schemas.microsoft.com/office/drawing/2014/main" id="{72D93420-327C-6A9D-F0C6-90F4F6977115}"/>
+              </a:ext>
+            </a:extLst>
+          </p:cNvPr>
+          <p:cNvSpPr>
+            <a:spLocks noGrp="1"/>
+          </p:cNvSpPr>
+          <p:nvPr>
+            <p:ph type="body" idx="1"/>
+          </p:nvPr>
+        </p:nvSpPr>
+        <p:spPr>
+          <a:xfrm>
+            <a:off x="2695194" y="5688535"/>
+            <a:ext cx="6801612" cy="536125"/>
+          </a:xfrm>
+        </p:spPr>
+        <p:txBody>
+          <a:bodyPr vert="horz" lIns="91440" tIns="45720" rIns="91440" bIns="45720" rtlCol="0">
+            <a:normAutofit/>
+          </a:bodyPr>
+          <a:lstStyle/>
+          <a:p>
+            <a:pPr algn="ctr"/>
+            <a:endParaRPr lang="en-US" sz="1800" kern="1200">
+              <a:solidFill>
+                <a:srgbClr val="FFFFFF"/>
+              </a:solidFill>
+              <a:latin typeface="+mn-lt"/>
+              <a:ea typeface="+mn-ea"/>
+              <a:cs typeface="+mn-cs"/>
+            </a:endParaRPr>
+          </a:p>
+        </p:txBody>
+      </p:sp>
+      <p:sp>
+        <p:nvSpPr>
+          <p:cNvPr id="6" name="Rectangle 5" descr="Statistics">
+            <a:extLst>
+              <a:ext uri="{FF2B5EF4-FFF2-40B4-BE49-F238E27FC236}">
+                <a16:creationId xmlns:a16="http://schemas.microsoft.com/office/drawing/2014/main" id="{FB2A54DF-F030-D28E-C316-C01D541EDA1D}"/>
+              </a:ext>
+            </a:extLst>
+          </p:cNvPr>
+          <p:cNvSpPr/>
+          <p:nvPr/>
+        </p:nvSpPr>
+        <p:spPr>
+          <a:xfrm>
+            <a:off x="4445346" y="722849"/>
+            <a:ext cx="3301307" cy="3135764"/>
+          </a:xfrm>
+          <a:prstGeom prst="rect">
+            <a:avLst/>
+          </a:prstGeom>
+          <a:blipFill>
+            <a:blip r:embed="rId2">
+              <a:extLst>
+                <a:ext uri="{28A0092B-C50C-407E-A947-70E740481C1C}">
+                  <a14:useLocalDpi xmlns:a14="http://schemas.microsoft.com/office/drawing/2010/main" val="0"/>
+                </a:ext>
+                <a:ext uri="{96DAC541-7B7A-43D3-8B79-37D633B846F1}">
+                  <asvg:svgBlip xmlns:asvg="http://schemas.microsoft.com/office/drawing/2016/SVG/main" r:embed="rId3"/>
+                </a:ext>
+              </a:extLst>
+            </a:blip>
+            <a:stretch>
+              <a:fillRect/>
+            </a:stretch>
+          </a:blipFill>
+        </p:spPr>
+        <p:style>
+          <a:lnRef idx="2">
+            <a:schemeClr val="lt1">
+              <a:hueOff val="0"/>
+              <a:satOff val="0"/>
+              <a:lumOff val="0"/>
+              <a:alphaOff val="0"/>
+            </a:schemeClr>
+          </a:lnRef>
+          <a:fillRef idx="1">
+            <a:scrgbClr r="0" g="0" b="0"/>
+          </a:fillRef>
+          <a:effectRef idx="0">
+            <a:schemeClr val="accent1">
+              <a:hueOff val="0"/>
+              <a:satOff val="0"/>
+              <a:lumOff val="0"/>
+              <a:alphaOff val="0"/>
+            </a:schemeClr>
+          </a:effectRef>
+          <a:fontRef idx="minor">
+            <a:schemeClr val="lt1"/>
+          </a:fontRef>
+        </p:style>
+        <p:txBody>
+          <a:bodyPr/>
+          <a:lstStyle/>
+          <a:p>
+            <a:endParaRPr lang="en-US"/>
+          </a:p>
+        </p:txBody>
+      </p:sp>
+    </p:spTree>
+    <p:extLst>
+      <p:ext uri="{BB962C8B-B14F-4D97-AF65-F5344CB8AC3E}">
+        <p14:creationId xmlns:p14="http://schemas.microsoft.com/office/powerpoint/2010/main" val="1497631296"/>
+      </p:ext>
+    </p:extLst>
+  </p:cSld>
+  <p:clrMapOvr>
+    <a:overrideClrMapping bg1="lt1" tx1="dk1" bg2="lt2" tx2="dk2" accent1="accent1" accent2="accent2" accent3="accent3" accent4="accent4" accent5="accent5" accent6="accent6" hlink="hlink" folHlink="folHlink"/>
+  </p:clrMapOvr>
+</p:sld>
+</file>
+
+<file path=ppt/slides/slide2.xml><?xml version="1.0" encoding="utf-8"?>
+<p:sld xmlns:a="http://schemas.openxmlformats.org/drawingml/2006/main" xmlns:r="http://schemas.openxmlformats.org/officeDocument/2006/relationships" xmlns:p="http://schemas.openxmlformats.org/presentationml/2006/main">
+  <p:cSld>
+    <p:spTree>
+      <p:nvGrpSpPr>
+        <p:cNvPr id="1" name=""/>
+        <p:cNvGrpSpPr/>
+        <p:nvPr/>
+      </p:nvGrpSpPr>
+      <p:grpSpPr>
+        <a:xfrm>
+          <a:off x="0" y="0"/>
+          <a:ext cx="0" cy="0"/>
+          <a:chOff x="0" y="0"/>
+          <a:chExt cx="0" cy="0"/>
+        </a:xfrm>
+      </p:grpSpPr>
+      <p:sp>
+        <p:nvSpPr>
+          <p:cNvPr id="2" name="Title 1">
+            <a:extLst>
+              <a:ext uri="{FF2B5EF4-FFF2-40B4-BE49-F238E27FC236}">
+                <a16:creationId xmlns:a16="http://schemas.microsoft.com/office/drawing/2014/main" id="{C0AFCDE6-6A29-9218-100C-14BFDA49F63E}"/>
+              </a:ext>
+            </a:extLst>
+          </p:cNvPr>
+          <p:cNvSpPr>
+            <a:spLocks noGrp="1"/>
+          </p:cNvSpPr>
+          <p:nvPr>
+            <p:ph type="title"/>
+          </p:nvPr>
+        </p:nvSpPr>
+        <p:spPr/>
+        <p:txBody>
+          <a:bodyPr/>
+          <a:lstStyle/>
+          <a:p>
+            <a:r>
+              <a:rPr lang="en-US" dirty="0"/>
+              <a:t>Overview</a:t>
+            </a:r>
+          </a:p>
+        </p:txBody>
+      </p:sp>
+      <p:graphicFrame>
+        <p:nvGraphicFramePr>
+          <p:cNvPr id="11" name="Content Placeholder 2">
+            <a:extLst>
+              <a:ext uri="{FF2B5EF4-FFF2-40B4-BE49-F238E27FC236}">
+                <a16:creationId xmlns:a16="http://schemas.microsoft.com/office/drawing/2014/main" id="{DAF59651-1269-B616-E212-DFC722E38CF8}"/>
+              </a:ext>
+            </a:extLst>
+          </p:cNvPr>
+          <p:cNvGraphicFramePr>
+            <a:graphicFrameLocks noGrp="1"/>
+          </p:cNvGraphicFramePr>
+          <p:nvPr>
+            <p:ph idx="1"/>
+            <p:extLst>
+              <p:ext uri="{D42A27DB-BD31-4B8C-83A1-F6EECF244321}">
+                <p14:modId xmlns:p14="http://schemas.microsoft.com/office/powerpoint/2010/main" val="1150006793"/>
+              </p:ext>
+            </p:extLst>
+          </p:nvPr>
+        </p:nvGraphicFramePr>
+        <p:xfrm>
+          <a:off x="6736080" y="804672"/>
+          <a:ext cx="4815840" cy="5248656"/>
+        </p:xfrm>
+        <a:graphic>
+          <a:graphicData uri="http://schemas.openxmlformats.org/drawingml/2006/diagram">
+            <dgm:relIds xmlns:dgm="http://schemas.openxmlformats.org/drawingml/2006/diagram" xmlns:r="http://schemas.openxmlformats.org/officeDocument/2006/relationships" r:dm="rId3" r:lo="rId4" r:qs="rId5" r:cs="rId6"/>
+          </a:graphicData>
+        </a:graphic>
+      </p:graphicFrame>
+      <p:sp>
+        <p:nvSpPr>
+          <p:cNvPr id="4" name="Text Placeholder 3">
+            <a:extLst>
+              <a:ext uri="{FF2B5EF4-FFF2-40B4-BE49-F238E27FC236}">
+                <a16:creationId xmlns:a16="http://schemas.microsoft.com/office/drawing/2014/main" id="{3D913A50-9491-D3A6-190E-17DC1E4E5C1F}"/>
+              </a:ext>
+            </a:extLst>
+          </p:cNvPr>
+          <p:cNvSpPr>
+            <a:spLocks noGrp="1"/>
+          </p:cNvSpPr>
+          <p:nvPr>
+            <p:ph type="body" sz="half" idx="2"/>
+          </p:nvPr>
+        </p:nvSpPr>
+        <p:spPr/>
+        <p:txBody>
+          <a:bodyPr/>
+          <a:lstStyle/>
+          <a:p>
+            <a:endParaRPr lang="en-US"/>
+          </a:p>
+        </p:txBody>
+      </p:sp>
+    </p:spTree>
+    <p:extLst>
+      <p:ext uri="{BB962C8B-B14F-4D97-AF65-F5344CB8AC3E}">
+        <p14:creationId xmlns:p14="http://schemas.microsoft.com/office/powerpoint/2010/main" val="1419728036"/>
+      </p:ext>
+    </p:extLst>
+  </p:cSld>
+  <p:clrMapOvr>
+    <a:masterClrMapping/>
+  </p:clrMapOvr>
+</p:sld>
+</file>
+
+<file path=ppt/slides/slide20.xml><?xml version="1.0" encoding="utf-8"?>
+<p:sld xmlns:a="http://schemas.openxmlformats.org/drawingml/2006/main" xmlns:r="http://schemas.openxmlformats.org/officeDocument/2006/relationships" xmlns:p="http://schemas.openxmlformats.org/presentationml/2006/main">
+  <p:cSld>
+    <p:spTree>
+      <p:nvGrpSpPr>
+        <p:cNvPr id="1" name=""/>
+        <p:cNvGrpSpPr/>
+        <p:nvPr/>
+      </p:nvGrpSpPr>
+      <p:grpSpPr>
+        <a:xfrm>
+          <a:off x="0" y="0"/>
+          <a:ext cx="0" cy="0"/>
+          <a:chOff x="0" y="0"/>
+          <a:chExt cx="0" cy="0"/>
+        </a:xfrm>
+      </p:grpSpPr>
+      <p:sp>
+        <p:nvSpPr>
+          <p:cNvPr id="2" name="Title 1">
+            <a:extLst>
+              <a:ext uri="{FF2B5EF4-FFF2-40B4-BE49-F238E27FC236}">
+                <a16:creationId xmlns:a16="http://schemas.microsoft.com/office/drawing/2014/main" id="{291B4186-057C-8A7E-7B19-CDEB8BC0A170}"/>
+              </a:ext>
+            </a:extLst>
+          </p:cNvPr>
+          <p:cNvSpPr>
+            <a:spLocks noGrp="1"/>
+          </p:cNvSpPr>
+          <p:nvPr>
+            <p:ph type="title"/>
+          </p:nvPr>
+        </p:nvSpPr>
+        <p:spPr/>
+        <p:txBody>
+          <a:bodyPr/>
+          <a:lstStyle/>
+          <a:p>
+            <a:endParaRPr lang="en-US"/>
+          </a:p>
+        </p:txBody>
+      </p:sp>
+      <p:sp>
+        <p:nvSpPr>
+          <p:cNvPr id="3" name="Content Placeholder 2">
+            <a:extLst>
+              <a:ext uri="{FF2B5EF4-FFF2-40B4-BE49-F238E27FC236}">
+                <a16:creationId xmlns:a16="http://schemas.microsoft.com/office/drawing/2014/main" id="{AB5C0998-D407-DA29-527D-842E274DA672}"/>
+              </a:ext>
+            </a:extLst>
+          </p:cNvPr>
+          <p:cNvSpPr>
+            <a:spLocks noGrp="1"/>
+          </p:cNvSpPr>
+          <p:nvPr>
+            <p:ph idx="1"/>
+          </p:nvPr>
+        </p:nvSpPr>
+        <p:spPr/>
+        <p:txBody>
+          <a:bodyPr/>
+          <a:lstStyle/>
+          <a:p>
+            <a:endParaRPr lang="en-US"/>
+          </a:p>
+        </p:txBody>
+      </p:sp>
+    </p:spTree>
+    <p:extLst>
+      <p:ext uri="{BB962C8B-B14F-4D97-AF65-F5344CB8AC3E}">
+        <p14:creationId xmlns:p14="http://schemas.microsoft.com/office/powerpoint/2010/main" val="301932073"/>
+      </p:ext>
+    </p:extLst>
+  </p:cSld>
+  <p:clrMapOvr>
+    <a:masterClrMapping/>
+  </p:clrMapOvr>
+</p:sld>
+</file>
+
+<file path=ppt/slides/slide21.xml><?xml version="1.0" encoding="utf-8"?>
 <p:sld xmlns:a="http://schemas.openxmlformats.org/drawingml/2006/main" xmlns:r="http://schemas.openxmlformats.org/officeDocument/2006/relationships" xmlns:p="http://schemas.openxmlformats.org/presentationml/2006/main">
   <p:cSld>
     <p:bg>
@@ -7912,7 +9930,7 @@
 </p:sld>
 </file>
 
-<file path=ppt/slides/slide11.xml><?xml version="1.0" encoding="utf-8"?>
+<file path=ppt/slides/slide22.xml><?xml version="1.0" encoding="utf-8"?>
 <p:sld xmlns:a="http://schemas.openxmlformats.org/drawingml/2006/main" xmlns:r="http://schemas.openxmlformats.org/officeDocument/2006/relationships" xmlns:p="http://schemas.openxmlformats.org/presentationml/2006/main">
   <p:cSld>
     <p:spTree>
@@ -7992,7 +10010,7 @@
 </p:sld>
 </file>
 
-<file path=ppt/slides/slide12.xml><?xml version="1.0" encoding="utf-8"?>
+<file path=ppt/slides/slide23.xml><?xml version="1.0" encoding="utf-8"?>
 <p:sld xmlns:a="http://schemas.openxmlformats.org/drawingml/2006/main" xmlns:r="http://schemas.openxmlformats.org/officeDocument/2006/relationships" xmlns:p="http://schemas.openxmlformats.org/presentationml/2006/main">
   <p:cSld>
     <p:spTree>
@@ -8075,7 +10093,7 @@
 </p:sld>
 </file>
 
-<file path=ppt/slides/slide13.xml><?xml version="1.0" encoding="utf-8"?>
+<file path=ppt/slides/slide24.xml><?xml version="1.0" encoding="utf-8"?>
 <p:sld xmlns:a="http://schemas.openxmlformats.org/drawingml/2006/main" xmlns:r="http://schemas.openxmlformats.org/officeDocument/2006/relationships" xmlns:p="http://schemas.openxmlformats.org/presentationml/2006/main">
   <p:cSld>
     <p:spTree>
@@ -8150,120 +10168,6 @@
     <p:extLst>
       <p:ext uri="{BB962C8B-B14F-4D97-AF65-F5344CB8AC3E}">
         <p14:creationId xmlns:p14="http://schemas.microsoft.com/office/powerpoint/2010/main" val="4029083301"/>
-      </p:ext>
-    </p:extLst>
-  </p:cSld>
-  <p:clrMapOvr>
-    <a:masterClrMapping/>
-  </p:clrMapOvr>
-</p:sld>
-</file>
-
-<file path=ppt/slides/slide2.xml><?xml version="1.0" encoding="utf-8"?>
-<p:sld xmlns:a="http://schemas.openxmlformats.org/drawingml/2006/main" xmlns:r="http://schemas.openxmlformats.org/officeDocument/2006/relationships" xmlns:p="http://schemas.openxmlformats.org/presentationml/2006/main">
-  <p:cSld>
-    <p:spTree>
-      <p:nvGrpSpPr>
-        <p:cNvPr id="1" name=""/>
-        <p:cNvGrpSpPr/>
-        <p:nvPr/>
-      </p:nvGrpSpPr>
-      <p:grpSpPr>
-        <a:xfrm>
-          <a:off x="0" y="0"/>
-          <a:ext cx="0" cy="0"/>
-          <a:chOff x="0" y="0"/>
-          <a:chExt cx="0" cy="0"/>
-        </a:xfrm>
-      </p:grpSpPr>
-      <p:sp>
-        <p:nvSpPr>
-          <p:cNvPr id="2" name="Title 1">
-            <a:extLst>
-              <a:ext uri="{FF2B5EF4-FFF2-40B4-BE49-F238E27FC236}">
-                <a16:creationId xmlns:a16="http://schemas.microsoft.com/office/drawing/2014/main" id="{C0AFCDE6-6A29-9218-100C-14BFDA49F63E}"/>
-              </a:ext>
-            </a:extLst>
-          </p:cNvPr>
-          <p:cNvSpPr>
-            <a:spLocks noGrp="1"/>
-          </p:cNvSpPr>
-          <p:nvPr>
-            <p:ph type="title"/>
-          </p:nvPr>
-        </p:nvSpPr>
-        <p:spPr/>
-        <p:txBody>
-          <a:bodyPr/>
-          <a:lstStyle/>
-          <a:p>
-            <a:r>
-              <a:rPr lang="en-US" dirty="0"/>
-              <a:t>Overview</a:t>
-            </a:r>
-          </a:p>
-        </p:txBody>
-      </p:sp>
-      <p:graphicFrame>
-        <p:nvGraphicFramePr>
-          <p:cNvPr id="11" name="Content Placeholder 2">
-            <a:extLst>
-              <a:ext uri="{FF2B5EF4-FFF2-40B4-BE49-F238E27FC236}">
-                <a16:creationId xmlns:a16="http://schemas.microsoft.com/office/drawing/2014/main" id="{DAF59651-1269-B616-E212-DFC722E38CF8}"/>
-              </a:ext>
-            </a:extLst>
-          </p:cNvPr>
-          <p:cNvGraphicFramePr>
-            <a:graphicFrameLocks noGrp="1"/>
-          </p:cNvGraphicFramePr>
-          <p:nvPr>
-            <p:ph idx="1"/>
-            <p:extLst>
-              <p:ext uri="{D42A27DB-BD31-4B8C-83A1-F6EECF244321}">
-                <p14:modId xmlns:p14="http://schemas.microsoft.com/office/powerpoint/2010/main" val="346562239"/>
-              </p:ext>
-            </p:extLst>
-          </p:nvPr>
-        </p:nvGraphicFramePr>
-        <p:xfrm>
-          <a:off x="6736080" y="804672"/>
-          <a:ext cx="4815840" cy="5248656"/>
-        </p:xfrm>
-        <a:graphic>
-          <a:graphicData uri="http://schemas.openxmlformats.org/drawingml/2006/diagram">
-            <dgm:relIds xmlns:dgm="http://schemas.openxmlformats.org/drawingml/2006/diagram" xmlns:r="http://schemas.openxmlformats.org/officeDocument/2006/relationships" r:dm="rId3" r:lo="rId4" r:qs="rId5" r:cs="rId6"/>
-          </a:graphicData>
-        </a:graphic>
-      </p:graphicFrame>
-      <p:sp>
-        <p:nvSpPr>
-          <p:cNvPr id="4" name="Text Placeholder 3">
-            <a:extLst>
-              <a:ext uri="{FF2B5EF4-FFF2-40B4-BE49-F238E27FC236}">
-                <a16:creationId xmlns:a16="http://schemas.microsoft.com/office/drawing/2014/main" id="{3D913A50-9491-D3A6-190E-17DC1E4E5C1F}"/>
-              </a:ext>
-            </a:extLst>
-          </p:cNvPr>
-          <p:cNvSpPr>
-            <a:spLocks noGrp="1"/>
-          </p:cNvSpPr>
-          <p:nvPr>
-            <p:ph type="body" sz="half" idx="2"/>
-          </p:nvPr>
-        </p:nvSpPr>
-        <p:spPr/>
-        <p:txBody>
-          <a:bodyPr/>
-          <a:lstStyle/>
-          <a:p>
-            <a:endParaRPr lang="en-US"/>
-          </a:p>
-        </p:txBody>
-      </p:sp>
-    </p:spTree>
-    <p:extLst>
-      <p:ext uri="{BB962C8B-B14F-4D97-AF65-F5344CB8AC3E}">
-        <p14:creationId xmlns:p14="http://schemas.microsoft.com/office/powerpoint/2010/main" val="1419728036"/>
       </p:ext>
     </p:extLst>
   </p:cSld>
@@ -8605,7 +10509,12 @@
             <p:ph idx="1"/>
           </p:nvPr>
         </p:nvSpPr>
-        <p:spPr/>
+        <p:spPr>
+          <a:xfrm>
+            <a:off x="2231136" y="2498651"/>
+            <a:ext cx="7729728" cy="3838354"/>
+          </a:xfrm>
+        </p:spPr>
         <p:txBody>
           <a:bodyPr>
             <a:normAutofit/>
@@ -8613,21 +10522,21 @@
           <a:lstStyle/>
           <a:p>
             <a:r>
-              <a:rPr lang="en-US" b="1" dirty="0"/>
+              <a:rPr lang="en-US" sz="2000" b="1" dirty="0"/>
               <a:t>Dataset</a:t>
             </a:r>
             <a:r>
-              <a:rPr lang="en-US" dirty="0"/>
+              <a:rPr lang="en-US" sz="2000" dirty="0"/>
               <a:t>: </a:t>
             </a:r>
             <a:r>
-              <a:rPr lang="en-US" i="1" dirty="0">
+              <a:rPr lang="en-US" sz="2000" i="1" dirty="0">
                 <a:hlinkClick r:id="rId3"/>
               </a:rPr>
               <a:t>Chronic illness: symptoms, treatments and triggers</a:t>
             </a:r>
             <a:r>
-              <a:rPr lang="en-US" dirty="0"/>
+              <a:rPr lang="en-US" sz="2000" dirty="0"/>
               <a:t> from Kaggle</a:t>
             </a:r>
           </a:p>
@@ -8638,15 +10547,15 @@
               </a:lnSpc>
             </a:pPr>
             <a:r>
-              <a:rPr lang="en-US" b="1" dirty="0"/>
+              <a:rPr lang="en-US" sz="1800" b="1" dirty="0"/>
               <a:t>Download</a:t>
             </a:r>
             <a:r>
-              <a:rPr lang="en-US" dirty="0"/>
+              <a:rPr lang="en-US" sz="1800" dirty="0"/>
               <a:t>: </a:t>
             </a:r>
             <a:r>
-              <a:rPr lang="en-US" i="1" u="none" strike="noStrike" dirty="0" err="1">
+              <a:rPr lang="en-US" sz="1800" i="1" u="none" strike="noStrike" dirty="0" err="1">
                 <a:solidFill>
                   <a:srgbClr val="202124"/>
                 </a:solidFill>
@@ -8656,7 +10565,7 @@
               <a:t>export.csv</a:t>
             </a:r>
             <a:r>
-              <a:rPr lang="en-US" i="1" u="none" strike="noStrike" dirty="0">
+              <a:rPr lang="en-US" sz="1800" i="1" u="none" strike="noStrike" dirty="0">
                 <a:solidFill>
                   <a:srgbClr val="202124"/>
                 </a:solidFill>
@@ -8666,7 +10575,7 @@
               <a:t> </a:t>
             </a:r>
             <a:r>
-              <a:rPr lang="en-US" b="0" i="0" u="none" strike="noStrike" dirty="0">
+              <a:rPr lang="en-US" sz="1800" b="0" i="0" u="none" strike="noStrike" dirty="0">
                 <a:solidFill>
                   <a:srgbClr val="5F6368"/>
                 </a:solidFill>
@@ -8675,7 +10584,7 @@
               </a:rPr>
               <a:t>(686.17 MB)</a:t>
             </a:r>
-            <a:endParaRPr lang="en-US" b="1" i="0" u="none" strike="noStrike" dirty="0">
+            <a:endParaRPr lang="en-US" sz="1800" b="1" i="0" u="none" strike="noStrike" dirty="0">
               <a:solidFill>
                 <a:srgbClr val="202124"/>
               </a:solidFill>
@@ -8685,60 +10594,60 @@
           </a:p>
           <a:p>
             <a:r>
-              <a:rPr lang="en-US" b="1" dirty="0"/>
+              <a:rPr lang="en-US" sz="2000" b="1" dirty="0"/>
               <a:t>About the data:</a:t>
             </a:r>
           </a:p>
           <a:p>
             <a:pPr lvl="1"/>
             <a:r>
-              <a:rPr lang="en-US" b="1" dirty="0"/>
+              <a:rPr lang="en-US" sz="1800" b="1" dirty="0"/>
               <a:t>Size</a:t>
             </a:r>
             <a:r>
-              <a:rPr lang="en-US" dirty="0"/>
+              <a:rPr lang="en-US" sz="1800" dirty="0"/>
               <a:t>: 7,976,223 rows x 9 cols</a:t>
             </a:r>
           </a:p>
           <a:p>
             <a:pPr lvl="1"/>
             <a:r>
-              <a:rPr lang="en-US" b="1" dirty="0"/>
+              <a:rPr lang="en-US" sz="1800" b="1" dirty="0"/>
               <a:t>Source</a:t>
             </a:r>
             <a:r>
-              <a:rPr lang="en-US" dirty="0"/>
+              <a:rPr lang="en-US" sz="1800" dirty="0"/>
               <a:t>: </a:t>
             </a:r>
             <a:r>
-              <a:rPr lang="en-US" i="1" dirty="0" err="1"/>
+              <a:rPr lang="en-US" sz="1800" i="1" dirty="0" err="1"/>
               <a:t>Flaredown</a:t>
             </a:r>
             <a:r>
-              <a:rPr lang="en-US" i="1" dirty="0"/>
+              <a:rPr lang="en-US" sz="1800" i="1" dirty="0"/>
               <a:t> </a:t>
             </a:r>
             <a:r>
-              <a:rPr lang="en-US" dirty="0"/>
+              <a:rPr lang="en-US" sz="1800" dirty="0"/>
               <a:t>app, used for tracking chronic autoimmune and invisible illnesses</a:t>
             </a:r>
           </a:p>
           <a:p>
             <a:pPr lvl="1"/>
             <a:r>
-              <a:rPr lang="en-US" dirty="0"/>
+              <a:rPr lang="en-US" sz="1800" dirty="0"/>
               <a:t>Includes conditions, symptoms, treatments, food, tags (“trackables”) recorded by users</a:t>
             </a:r>
           </a:p>
           <a:p>
             <a:pPr lvl="1"/>
             <a:r>
-              <a:rPr lang="en-US" dirty="0"/>
+              <a:rPr lang="en-US" sz="1800" dirty="0"/>
               <a:t>Also includes weather, user info, and if applicable, HBI (Harvey Bradshaw Index), "a standardized metric to gauge the severity of Crohn's disease"</a:t>
             </a:r>
           </a:p>
           <a:p>
-            <a:endParaRPr lang="en-US" dirty="0"/>
+            <a:endParaRPr lang="en-US" sz="2000" dirty="0"/>
           </a:p>
         </p:txBody>
       </p:sp>
@@ -8845,6 +10754,95 @@
 </file>
 
 <file path=ppt/slides/slide6.xml><?xml version="1.0" encoding="utf-8"?>
+<p:sld xmlns:a="http://schemas.openxmlformats.org/drawingml/2006/main" xmlns:r="http://schemas.openxmlformats.org/officeDocument/2006/relationships" xmlns:p="http://schemas.openxmlformats.org/presentationml/2006/main">
+  <p:cSld>
+    <p:spTree>
+      <p:nvGrpSpPr>
+        <p:cNvPr id="1" name="">
+          <a:extLst>
+            <a:ext uri="{FF2B5EF4-FFF2-40B4-BE49-F238E27FC236}">
+              <a16:creationId xmlns:a16="http://schemas.microsoft.com/office/drawing/2014/main" id="{900014D8-8549-800C-54A3-1798D9599301}"/>
+            </a:ext>
+          </a:extLst>
+        </p:cNvPr>
+        <p:cNvGrpSpPr/>
+        <p:nvPr/>
+      </p:nvGrpSpPr>
+      <p:grpSpPr>
+        <a:xfrm>
+          <a:off x="0" y="0"/>
+          <a:ext cx="0" cy="0"/>
+          <a:chOff x="0" y="0"/>
+          <a:chExt cx="0" cy="0"/>
+        </a:xfrm>
+      </p:grpSpPr>
+      <p:sp>
+        <p:nvSpPr>
+          <p:cNvPr id="2" name="Title 1">
+            <a:extLst>
+              <a:ext uri="{FF2B5EF4-FFF2-40B4-BE49-F238E27FC236}">
+                <a16:creationId xmlns:a16="http://schemas.microsoft.com/office/drawing/2014/main" id="{451403F0-345B-C5B5-979E-0FB40941E932}"/>
+              </a:ext>
+            </a:extLst>
+          </p:cNvPr>
+          <p:cNvSpPr>
+            <a:spLocks noGrp="1"/>
+          </p:cNvSpPr>
+          <p:nvPr>
+            <p:ph type="title"/>
+          </p:nvPr>
+        </p:nvSpPr>
+        <p:spPr/>
+        <p:txBody>
+          <a:bodyPr/>
+          <a:lstStyle/>
+          <a:p>
+            <a:r>
+              <a:rPr lang="en-US" dirty="0"/>
+              <a:t>Environment Setup</a:t>
+            </a:r>
+          </a:p>
+        </p:txBody>
+      </p:sp>
+      <p:sp>
+        <p:nvSpPr>
+          <p:cNvPr id="3" name="Content Placeholder 2">
+            <a:extLst>
+              <a:ext uri="{FF2B5EF4-FFF2-40B4-BE49-F238E27FC236}">
+                <a16:creationId xmlns:a16="http://schemas.microsoft.com/office/drawing/2014/main" id="{F856BEB6-B50F-A37C-EA52-BFFA178F4E7D}"/>
+              </a:ext>
+            </a:extLst>
+          </p:cNvPr>
+          <p:cNvSpPr>
+            <a:spLocks noGrp="1"/>
+          </p:cNvSpPr>
+          <p:nvPr>
+            <p:ph idx="1"/>
+          </p:nvPr>
+        </p:nvSpPr>
+        <p:spPr/>
+        <p:txBody>
+          <a:bodyPr/>
+          <a:lstStyle/>
+          <a:p>
+            <a:endParaRPr lang="en-US" dirty="0"/>
+          </a:p>
+        </p:txBody>
+      </p:sp>
+    </p:spTree>
+    <p:extLst>
+      <p:ext uri="{BB962C8B-B14F-4D97-AF65-F5344CB8AC3E}">
+        <p14:creationId xmlns:p14="http://schemas.microsoft.com/office/powerpoint/2010/main" val="108672908"/>
+      </p:ext>
+    </p:extLst>
+  </p:cSld>
+  <p:clrMapOvr>
+    <a:masterClrMapping/>
+  </p:clrMapOvr>
+</p:sld>
+</file>
+
+<file path=ppt/slides/slide7.xml><?xml version="1.0" encoding="utf-8"?>
 <p:sld xmlns:a="http://schemas.openxmlformats.org/drawingml/2006/main" xmlns:r="http://schemas.openxmlformats.org/officeDocument/2006/relationships" xmlns:p="http://schemas.openxmlformats.org/presentationml/2006/main">
   <p:cSld>
     <p:bg>
@@ -9128,7 +11126,7 @@
 </p:sld>
 </file>
 
-<file path=ppt/slides/slide7.xml><?xml version="1.0" encoding="utf-8"?>
+<file path=ppt/slides/slide8.xml><?xml version="1.0" encoding="utf-8"?>
 <p:sld xmlns:a="http://schemas.openxmlformats.org/drawingml/2006/main" xmlns:r="http://schemas.openxmlformats.org/officeDocument/2006/relationships" xmlns:p="http://schemas.openxmlformats.org/presentationml/2006/main">
   <p:cSld>
     <p:spTree>
@@ -9166,7 +11164,10 @@
           <a:bodyPr/>
           <a:lstStyle/>
           <a:p>
-            <a:endParaRPr lang="en-US"/>
+            <a:r>
+              <a:rPr lang="en-US" dirty="0"/>
+              <a:t>Load &amp; Preview Data</a:t>
+            </a:r>
           </a:p>
         </p:txBody>
       </p:sp>
@@ -9186,15 +11187,109 @@
             <p:ph idx="1"/>
           </p:nvPr>
         </p:nvSpPr>
-        <p:spPr/>
-        <p:txBody>
-          <a:bodyPr/>
+        <p:spPr>
+          <a:xfrm>
+            <a:off x="2231136" y="2245858"/>
+            <a:ext cx="7729728" cy="3494170"/>
+          </a:xfrm>
+        </p:spPr>
+        <p:txBody>
+          <a:bodyPr>
+            <a:normAutofit/>
+          </a:bodyPr>
           <a:lstStyle/>
           <a:p>
-            <a:endParaRPr lang="en-US"/>
-          </a:p>
-        </p:txBody>
-      </p:sp>
+            <a:r>
+              <a:rPr lang="en-US" sz="2000" dirty="0"/>
+              <a:t>Download </a:t>
+            </a:r>
+            <a:r>
+              <a:rPr lang="en-US" sz="2000" i="1" dirty="0" err="1"/>
+              <a:t>export.csv</a:t>
+            </a:r>
+            <a:r>
+              <a:rPr lang="en-US" sz="2000" i="1" dirty="0"/>
+              <a:t> </a:t>
+            </a:r>
+            <a:r>
+              <a:rPr lang="en-US" sz="2000" dirty="0"/>
+              <a:t>from </a:t>
+            </a:r>
+            <a:r>
+              <a:rPr lang="en-US" sz="2000" dirty="0">
+                <a:hlinkClick r:id="rId2"/>
+              </a:rPr>
+              <a:t>Kaggle</a:t>
+            </a:r>
+            <a:endParaRPr lang="en-US" sz="2000" dirty="0"/>
+          </a:p>
+          <a:p>
+            <a:r>
+              <a:rPr lang="en-US" sz="2000" dirty="0"/>
+              <a:t>Set your data path, then use pandas to load and preview data </a:t>
+            </a:r>
+          </a:p>
+        </p:txBody>
+      </p:sp>
+      <p:pic>
+        <p:nvPicPr>
+          <p:cNvPr id="9" name="Picture 8" descr="A screen shot of a computer&#10;&#10;AI-generated content may be incorrect.">
+            <a:extLst>
+              <a:ext uri="{FF2B5EF4-FFF2-40B4-BE49-F238E27FC236}">
+                <a16:creationId xmlns:a16="http://schemas.microsoft.com/office/drawing/2014/main" id="{94124A17-ADDC-5BB7-1679-CD5D5A71ECBC}"/>
+              </a:ext>
+            </a:extLst>
+          </p:cNvPr>
+          <p:cNvPicPr>
+            <a:picLocks noChangeAspect="1"/>
+          </p:cNvPicPr>
+          <p:nvPr/>
+        </p:nvPicPr>
+        <p:blipFill>
+          <a:blip r:embed="rId3"/>
+          <a:srcRect t="16575"/>
+          <a:stretch/>
+        </p:blipFill>
+        <p:spPr>
+          <a:xfrm>
+            <a:off x="162109" y="3166826"/>
+            <a:ext cx="4138053" cy="3494170"/>
+          </a:xfrm>
+          <a:prstGeom prst="rect">
+            <a:avLst/>
+          </a:prstGeom>
+        </p:spPr>
+      </p:pic>
+      <p:pic>
+        <p:nvPicPr>
+          <p:cNvPr id="11" name="Picture 10" descr="A screenshot of a computer&#10;&#10;AI-generated content may be incorrect.">
+            <a:extLst>
+              <a:ext uri="{FF2B5EF4-FFF2-40B4-BE49-F238E27FC236}">
+                <a16:creationId xmlns:a16="http://schemas.microsoft.com/office/drawing/2014/main" id="{ECB1FE96-15D6-B309-DDAC-C2EEEEECEEC3}"/>
+              </a:ext>
+            </a:extLst>
+          </p:cNvPr>
+          <p:cNvPicPr>
+            <a:picLocks noChangeAspect="1"/>
+          </p:cNvPicPr>
+          <p:nvPr/>
+        </p:nvPicPr>
+        <p:blipFill>
+          <a:blip r:embed="rId4"/>
+          <a:stretch>
+            <a:fillRect/>
+          </a:stretch>
+        </p:blipFill>
+        <p:spPr>
+          <a:xfrm>
+            <a:off x="4532413" y="3294633"/>
+            <a:ext cx="7497478" cy="3238555"/>
+          </a:xfrm>
+          <a:prstGeom prst="rect">
+            <a:avLst/>
+          </a:prstGeom>
+        </p:spPr>
+      </p:pic>
     </p:spTree>
     <p:extLst>
       <p:ext uri="{BB962C8B-B14F-4D97-AF65-F5344CB8AC3E}">
@@ -9204,316 +11299,6 @@
   </p:cSld>
   <p:clrMapOvr>
     <a:masterClrMapping/>
-  </p:clrMapOvr>
-</p:sld>
-</file>
-
-<file path=ppt/slides/slide8.xml><?xml version="1.0" encoding="utf-8"?>
-<p:sld xmlns:a="http://schemas.openxmlformats.org/drawingml/2006/main" xmlns:r="http://schemas.openxmlformats.org/officeDocument/2006/relationships" xmlns:p="http://schemas.openxmlformats.org/presentationml/2006/main">
-  <p:cSld>
-    <p:bg>
-      <p:bgPr>
-        <a:solidFill>
-          <a:schemeClr val="bg1"/>
-        </a:solidFill>
-        <a:effectLst/>
-      </p:bgPr>
-    </p:bg>
-    <p:spTree>
-      <p:nvGrpSpPr>
-        <p:cNvPr id="1" name="">
-          <a:extLst>
-            <a:ext uri="{FF2B5EF4-FFF2-40B4-BE49-F238E27FC236}">
-              <a16:creationId xmlns:a16="http://schemas.microsoft.com/office/drawing/2014/main" id="{D4E79579-4AFE-6419-0930-D48FBABA747C}"/>
-            </a:ext>
-          </a:extLst>
-        </p:cNvPr>
-        <p:cNvGrpSpPr/>
-        <p:nvPr/>
-      </p:nvGrpSpPr>
-      <p:grpSpPr>
-        <a:xfrm>
-          <a:off x="0" y="0"/>
-          <a:ext cx="0" cy="0"/>
-          <a:chOff x="0" y="0"/>
-          <a:chExt cx="0" cy="0"/>
-        </a:xfrm>
-      </p:grpSpPr>
-      <p:sp useBgFill="1">
-        <p:nvSpPr>
-          <p:cNvPr id="11" name="Rectangle 10">
-            <a:extLst>
-              <a:ext uri="{FF2B5EF4-FFF2-40B4-BE49-F238E27FC236}">
-                <a16:creationId xmlns:a16="http://schemas.microsoft.com/office/drawing/2014/main" id="{3ED03601-4724-4293-A32A-3A0879C5D491}"/>
-              </a:ext>
-              <a:ext uri="{C183D7F6-B498-43B3-948B-1728B52AA6E4}">
-                <adec:decorative xmlns:adec="http://schemas.microsoft.com/office/drawing/2017/decorative" val="1"/>
-              </a:ext>
-            </a:extLst>
-          </p:cNvPr>
-          <p:cNvSpPr>
-            <a:spLocks noGrp="1" noRot="1" noChangeAspect="1" noMove="1" noResize="1" noEditPoints="1" noAdjustHandles="1" noChangeArrowheads="1" noChangeShapeType="1" noTextEdit="1"/>
-          </p:cNvSpPr>
-          <p:nvPr>
-            <p:extLst>
-              <p:ext uri="{386F3935-93C4-4BCD-93E2-E3B085C9AB24}">
-                <p16:designElem xmlns:p16="http://schemas.microsoft.com/office/powerpoint/2015/main" val="1"/>
-              </p:ext>
-            </p:extLst>
-          </p:nvPr>
-        </p:nvSpPr>
-        <p:spPr>
-          <a:xfrm>
-            <a:off x="0" y="-2"/>
-            <a:ext cx="12192000" cy="6858002"/>
-          </a:xfrm>
-          <a:prstGeom prst="rect">
-            <a:avLst/>
-          </a:prstGeom>
-          <a:ln>
-            <a:noFill/>
-          </a:ln>
-        </p:spPr>
-        <p:style>
-          <a:lnRef idx="2">
-            <a:schemeClr val="accent1">
-              <a:shade val="50000"/>
-            </a:schemeClr>
-          </a:lnRef>
-          <a:fillRef idx="1">
-            <a:schemeClr val="accent1"/>
-          </a:fillRef>
-          <a:effectRef idx="0">
-            <a:schemeClr val="accent1"/>
-          </a:effectRef>
-          <a:fontRef idx="minor">
-            <a:schemeClr val="lt1"/>
-          </a:fontRef>
-        </p:style>
-        <p:txBody>
-          <a:bodyPr rtlCol="0" anchor="ctr"/>
-          <a:lstStyle/>
-          <a:p>
-            <a:pPr algn="ctr"/>
-            <a:endParaRPr lang="en-US"/>
-          </a:p>
-        </p:txBody>
-      </p:sp>
-      <p:sp>
-        <p:nvSpPr>
-          <p:cNvPr id="13" name="Rectangle 12">
-            <a:extLst>
-              <a:ext uri="{FF2B5EF4-FFF2-40B4-BE49-F238E27FC236}">
-                <a16:creationId xmlns:a16="http://schemas.microsoft.com/office/drawing/2014/main" id="{5E433AC3-E189-483B-9E8C-DFD5D2A18641}"/>
-              </a:ext>
-              <a:ext uri="{C183D7F6-B498-43B3-948B-1728B52AA6E4}">
-                <adec:decorative xmlns:adec="http://schemas.microsoft.com/office/drawing/2017/decorative" val="1"/>
-              </a:ext>
-            </a:extLst>
-          </p:cNvPr>
-          <p:cNvSpPr>
-            <a:spLocks noGrp="1" noRot="1" noChangeAspect="1" noMove="1" noResize="1" noEditPoints="1" noAdjustHandles="1" noChangeArrowheads="1" noChangeShapeType="1" noTextEdit="1"/>
-          </p:cNvSpPr>
-          <p:nvPr>
-            <p:extLst>
-              <p:ext uri="{386F3935-93C4-4BCD-93E2-E3B085C9AB24}">
-                <p16:designElem xmlns:p16="http://schemas.microsoft.com/office/powerpoint/2015/main" val="1"/>
-              </p:ext>
-            </p:extLst>
-          </p:nvPr>
-        </p:nvSpPr>
-        <p:spPr>
-          <a:xfrm>
-            <a:off x="0" y="4918509"/>
-            <a:ext cx="12192000" cy="1939491"/>
-          </a:xfrm>
-          <a:prstGeom prst="rect">
-            <a:avLst/>
-          </a:prstGeom>
-          <a:solidFill>
-            <a:schemeClr val="accent2"/>
-          </a:solidFill>
-          <a:ln>
-            <a:noFill/>
-          </a:ln>
-        </p:spPr>
-        <p:style>
-          <a:lnRef idx="2">
-            <a:schemeClr val="accent1">
-              <a:shade val="50000"/>
-            </a:schemeClr>
-          </a:lnRef>
-          <a:fillRef idx="1">
-            <a:schemeClr val="accent1"/>
-          </a:fillRef>
-          <a:effectRef idx="0">
-            <a:schemeClr val="accent1"/>
-          </a:effectRef>
-          <a:fontRef idx="minor">
-            <a:schemeClr val="lt1"/>
-          </a:fontRef>
-        </p:style>
-        <p:txBody>
-          <a:bodyPr rtlCol="0" anchor="ctr"/>
-          <a:lstStyle/>
-          <a:p>
-            <a:pPr algn="ctr"/>
-            <a:endParaRPr lang="en-US"/>
-          </a:p>
-        </p:txBody>
-      </p:sp>
-      <p:sp>
-        <p:nvSpPr>
-          <p:cNvPr id="2" name="Title 1">
-            <a:extLst>
-              <a:ext uri="{FF2B5EF4-FFF2-40B4-BE49-F238E27FC236}">
-                <a16:creationId xmlns:a16="http://schemas.microsoft.com/office/drawing/2014/main" id="{10C2E45B-7516-FF5D-1BAD-73E2B497DD5B}"/>
-              </a:ext>
-            </a:extLst>
-          </p:cNvPr>
-          <p:cNvSpPr>
-            <a:spLocks noGrp="1"/>
-          </p:cNvSpPr>
-          <p:nvPr>
-            <p:ph type="title"/>
-          </p:nvPr>
-        </p:nvSpPr>
-        <p:spPr>
-          <a:xfrm>
-            <a:off x="1600200" y="4269282"/>
-            <a:ext cx="8991600" cy="1264762"/>
-          </a:xfrm>
-        </p:spPr>
-        <p:txBody>
-          <a:bodyPr vert="horz" lIns="274320" tIns="182880" rIns="274320" bIns="182880" rtlCol="0" anchor="ctr" anchorCtr="1">
-            <a:normAutofit/>
-          </a:bodyPr>
-          <a:lstStyle/>
-          <a:p>
-            <a:r>
-              <a:rPr lang="en-US" sz="3200" dirty="0"/>
-              <a:t>Data Preprocessing</a:t>
-            </a:r>
-          </a:p>
-        </p:txBody>
-      </p:sp>
-      <p:sp>
-        <p:nvSpPr>
-          <p:cNvPr id="4" name="Text Placeholder 3">
-            <a:extLst>
-              <a:ext uri="{FF2B5EF4-FFF2-40B4-BE49-F238E27FC236}">
-                <a16:creationId xmlns:a16="http://schemas.microsoft.com/office/drawing/2014/main" id="{72D93420-327C-6A9D-F0C6-90F4F6977115}"/>
-              </a:ext>
-            </a:extLst>
-          </p:cNvPr>
-          <p:cNvSpPr>
-            <a:spLocks noGrp="1"/>
-          </p:cNvSpPr>
-          <p:nvPr>
-            <p:ph type="body" idx="1"/>
-          </p:nvPr>
-        </p:nvSpPr>
-        <p:spPr>
-          <a:xfrm>
-            <a:off x="2695194" y="5688535"/>
-            <a:ext cx="6801612" cy="536125"/>
-          </a:xfrm>
-        </p:spPr>
-        <p:txBody>
-          <a:bodyPr vert="horz" lIns="91440" tIns="45720" rIns="91440" bIns="45720" rtlCol="0">
-            <a:normAutofit/>
-          </a:bodyPr>
-          <a:lstStyle/>
-          <a:p>
-            <a:pPr algn="ctr"/>
-            <a:endParaRPr lang="en-US" sz="1800" kern="1200">
-              <a:solidFill>
-                <a:srgbClr val="FFFFFF"/>
-              </a:solidFill>
-              <a:latin typeface="+mn-lt"/>
-              <a:ea typeface="+mn-ea"/>
-              <a:cs typeface="+mn-cs"/>
-            </a:endParaRPr>
-          </a:p>
-        </p:txBody>
-      </p:sp>
-      <p:sp>
-        <p:nvSpPr>
-          <p:cNvPr id="6" name="Rectangle 5" descr="Statistics">
-            <a:extLst>
-              <a:ext uri="{FF2B5EF4-FFF2-40B4-BE49-F238E27FC236}">
-                <a16:creationId xmlns:a16="http://schemas.microsoft.com/office/drawing/2014/main" id="{FB2A54DF-F030-D28E-C316-C01D541EDA1D}"/>
-              </a:ext>
-            </a:extLst>
-          </p:cNvPr>
-          <p:cNvSpPr/>
-          <p:nvPr/>
-        </p:nvSpPr>
-        <p:spPr>
-          <a:xfrm>
-            <a:off x="4445346" y="722849"/>
-            <a:ext cx="3301307" cy="3135764"/>
-          </a:xfrm>
-          <a:prstGeom prst="rect">
-            <a:avLst/>
-          </a:prstGeom>
-          <a:blipFill>
-            <a:blip r:embed="rId2">
-              <a:extLst>
-                <a:ext uri="{28A0092B-C50C-407E-A947-70E740481C1C}">
-                  <a14:useLocalDpi xmlns:a14="http://schemas.microsoft.com/office/drawing/2010/main" val="0"/>
-                </a:ext>
-                <a:ext uri="{96DAC541-7B7A-43D3-8B79-37D633B846F1}">
-                  <asvg:svgBlip xmlns:asvg="http://schemas.microsoft.com/office/drawing/2016/SVG/main" r:embed="rId3"/>
-                </a:ext>
-              </a:extLst>
-            </a:blip>
-            <a:stretch>
-              <a:fillRect/>
-            </a:stretch>
-          </a:blipFill>
-        </p:spPr>
-        <p:style>
-          <a:lnRef idx="2">
-            <a:schemeClr val="lt1">
-              <a:hueOff val="0"/>
-              <a:satOff val="0"/>
-              <a:lumOff val="0"/>
-              <a:alphaOff val="0"/>
-            </a:schemeClr>
-          </a:lnRef>
-          <a:fillRef idx="1">
-            <a:scrgbClr r="0" g="0" b="0"/>
-          </a:fillRef>
-          <a:effectRef idx="0">
-            <a:schemeClr val="accent1">
-              <a:hueOff val="0"/>
-              <a:satOff val="0"/>
-              <a:lumOff val="0"/>
-              <a:alphaOff val="0"/>
-            </a:schemeClr>
-          </a:effectRef>
-          <a:fontRef idx="minor">
-            <a:schemeClr val="lt1"/>
-          </a:fontRef>
-        </p:style>
-        <p:txBody>
-          <a:bodyPr/>
-          <a:lstStyle/>
-          <a:p>
-            <a:endParaRPr lang="en-US"/>
-          </a:p>
-        </p:txBody>
-      </p:sp>
-    </p:spTree>
-    <p:extLst>
-      <p:ext uri="{BB962C8B-B14F-4D97-AF65-F5344CB8AC3E}">
-        <p14:creationId xmlns:p14="http://schemas.microsoft.com/office/powerpoint/2010/main" val="1497631296"/>
-      </p:ext>
-    </p:extLst>
-  </p:cSld>
-  <p:clrMapOvr>
-    <a:overrideClrMapping bg1="lt1" tx1="dk1" bg2="lt2" tx2="dk2" accent1="accent1" accent2="accent2" accent3="accent3" accent4="accent4" accent5="accent5" accent6="accent6" hlink="hlink" folHlink="folHlink"/>
   </p:clrMapOvr>
 </p:sld>
 </file>
@@ -9540,7 +11325,7 @@
           <p:cNvPr id="2" name="Title 1">
             <a:extLst>
               <a:ext uri="{FF2B5EF4-FFF2-40B4-BE49-F238E27FC236}">
-                <a16:creationId xmlns:a16="http://schemas.microsoft.com/office/drawing/2014/main" id="{291B4186-057C-8A7E-7B19-CDEB8BC0A170}"/>
+                <a16:creationId xmlns:a16="http://schemas.microsoft.com/office/drawing/2014/main" id="{A0BBB7C3-986F-8824-ADC2-577CB9666000}"/>
               </a:ext>
             </a:extLst>
           </p:cNvPr>
@@ -9556,16 +11341,19 @@
           <a:bodyPr/>
           <a:lstStyle/>
           <a:p>
-            <a:endParaRPr lang="en-US"/>
-          </a:p>
-        </p:txBody>
-      </p:sp>
-      <p:sp>
-        <p:nvSpPr>
-          <p:cNvPr id="3" name="Content Placeholder 2">
+            <a:r>
+              <a:rPr lang="en-US" dirty="0"/>
+              <a:t>Get User Data</a:t>
+            </a:r>
+          </a:p>
+        </p:txBody>
+      </p:sp>
+      <p:sp>
+        <p:nvSpPr>
+          <p:cNvPr id="7" name="Content Placeholder 6">
             <a:extLst>
               <a:ext uri="{FF2B5EF4-FFF2-40B4-BE49-F238E27FC236}">
-                <a16:creationId xmlns:a16="http://schemas.microsoft.com/office/drawing/2014/main" id="{AB5C0998-D407-DA29-527D-842E274DA672}"/>
+                <a16:creationId xmlns:a16="http://schemas.microsoft.com/office/drawing/2014/main" id="{CE2B993B-FC0B-11CA-BAEF-38A37314EA45}"/>
               </a:ext>
             </a:extLst>
           </p:cNvPr>
@@ -9576,19 +11364,70 @@
             <p:ph idx="1"/>
           </p:nvPr>
         </p:nvSpPr>
-        <p:spPr/>
-        <p:txBody>
-          <a:bodyPr/>
+        <p:spPr>
+          <a:xfrm>
+            <a:off x="2231136" y="2638044"/>
+            <a:ext cx="3245325" cy="3101983"/>
+          </a:xfrm>
+        </p:spPr>
+        <p:txBody>
+          <a:bodyPr>
+            <a:normAutofit/>
+          </a:bodyPr>
           <a:lstStyle/>
           <a:p>
-            <a:endParaRPr lang="en-US"/>
-          </a:p>
-        </p:txBody>
-      </p:sp>
+            <a:r>
+              <a:rPr lang="en-US" sz="2800" dirty="0"/>
+              <a:t>Get subset of data with drop duplicates for unique user info:</a:t>
+            </a:r>
+          </a:p>
+          <a:p>
+            <a:pPr lvl="1"/>
+            <a:r>
+              <a:rPr lang="en-US" sz="2400" dirty="0" err="1"/>
+              <a:t>user_id</a:t>
+            </a:r>
+            <a:r>
+              <a:rPr lang="en-US" sz="2400" dirty="0"/>
+              <a:t>, age, sex, and country</a:t>
+            </a:r>
+          </a:p>
+        </p:txBody>
+      </p:sp>
+      <p:pic>
+        <p:nvPicPr>
+          <p:cNvPr id="11" name="Picture 10" descr="A screen shot of a computer&#10;&#10;AI-generated content may be incorrect.">
+            <a:extLst>
+              <a:ext uri="{FF2B5EF4-FFF2-40B4-BE49-F238E27FC236}">
+                <a16:creationId xmlns:a16="http://schemas.microsoft.com/office/drawing/2014/main" id="{E37C2EF6-26F3-2474-3D36-AA3ED6DC6797}"/>
+              </a:ext>
+            </a:extLst>
+          </p:cNvPr>
+          <p:cNvPicPr>
+            <a:picLocks noChangeAspect="1"/>
+          </p:cNvPicPr>
+          <p:nvPr/>
+        </p:nvPicPr>
+        <p:blipFill>
+          <a:blip r:embed="rId2"/>
+          <a:stretch>
+            <a:fillRect/>
+          </a:stretch>
+        </p:blipFill>
+        <p:spPr>
+          <a:xfrm>
+            <a:off x="5476461" y="2365009"/>
+            <a:ext cx="6507922" cy="4329304"/>
+          </a:xfrm>
+          <a:prstGeom prst="rect">
+            <a:avLst/>
+          </a:prstGeom>
+        </p:spPr>
+      </p:pic>
     </p:spTree>
     <p:extLst>
       <p:ext uri="{BB962C8B-B14F-4D97-AF65-F5344CB8AC3E}">
-        <p14:creationId xmlns:p14="http://schemas.microsoft.com/office/powerpoint/2010/main" val="301932073"/>
+        <p14:creationId xmlns:p14="http://schemas.microsoft.com/office/powerpoint/2010/main" val="2131458243"/>
       </p:ext>
     </p:extLst>
   </p:cSld>
